--- a/training/slides/Module_07_Advanced_Topics.pptx
+++ b/training/slides/Module_07_Advanced_Topics.pptx
@@ -15,8 +15,6 @@
     <p:sldId id="263" r:id="rId14"/>
     <p:sldId id="264" r:id="rId15"/>
     <p:sldId id="265" r:id="rId16"/>
-    <p:sldId id="266" r:id="rId17"/>
-    <p:sldId id="267" r:id="rId18"/>
   </p:sldIdLst>
   <p:sldSz cx="12191695" cy="6858000" type="screen4x3"/>
   <p:notesSz cx="6858000" cy="9144000"/>
@@ -3095,7 +3093,7 @@
     <p:bg>
       <p:bgPr>
         <a:solidFill>
-          <a:srgbClr val="1A1A2E"/>
+          <a:srgbClr val="1E1B4B"/>
         </a:solidFill>
         <a:effectLst/>
       </p:bgPr>
@@ -3116,13 +3114,13 @@
         <p:spPr>
           <a:xfrm>
             <a:off x="0" y="0"/>
-            <a:ext cx="137160" cy="6858000"/>
+            <a:ext cx="5943600" cy="6858000"/>
           </a:xfrm>
           <a:prstGeom prst="rect">
             <a:avLst/>
           </a:prstGeom>
           <a:solidFill>
-            <a:srgbClr val="007BFF"/>
+            <a:srgbClr val="1E1B4B"/>
           </a:solidFill>
           <a:ln>
             <a:noFill/>
@@ -3152,50 +3150,288 @@
       </p:sp>
       <p:sp>
         <p:nvSpPr>
-          <p:cNvPr id="3" name="TextBox 2"/>
+          <p:cNvPr id="3" name="Rectangle 2"/>
+          <p:cNvSpPr/>
+          <p:nvPr/>
+        </p:nvSpPr>
+        <p:spPr>
+          <a:xfrm>
+            <a:off x="5943600" y="0"/>
+            <a:ext cx="3200400" cy="6858000"/>
+          </a:xfrm>
+          <a:prstGeom prst="rect">
+            <a:avLst/>
+          </a:prstGeom>
+          <a:solidFill>
+            <a:srgbClr val="312E81"/>
+          </a:solidFill>
+          <a:ln>
+            <a:noFill/>
+          </a:ln>
+        </p:spPr>
+        <p:style>
+          <a:lnRef idx="1">
+            <a:schemeClr val="accent1"/>
+          </a:lnRef>
+          <a:fillRef idx="3">
+            <a:schemeClr val="accent1"/>
+          </a:fillRef>
+          <a:effectRef idx="2">
+            <a:schemeClr val="accent1"/>
+          </a:effectRef>
+          <a:fontRef idx="minor">
+            <a:schemeClr val="lt1"/>
+          </a:fontRef>
+        </p:style>
+        <p:txBody>
+          <a:bodyPr rtlCol="0" anchor="ctr"/>
+          <a:lstStyle/>
+          <a:p>
+            <a:pPr algn="ctr"/>
+          </a:p>
+        </p:txBody>
+      </p:sp>
+      <p:sp>
+        <p:nvSpPr>
+          <p:cNvPr id="4" name="Rectangle 3"/>
+          <p:cNvSpPr/>
+          <p:nvPr/>
+        </p:nvSpPr>
+        <p:spPr>
+          <a:xfrm>
+            <a:off x="9144000" y="0"/>
+            <a:ext cx="3047695" cy="6858000"/>
+          </a:xfrm>
+          <a:prstGeom prst="rect">
+            <a:avLst/>
+          </a:prstGeom>
+          <a:solidFill>
+            <a:srgbClr val="4338CA"/>
+          </a:solidFill>
+          <a:ln>
+            <a:noFill/>
+          </a:ln>
+        </p:spPr>
+        <p:style>
+          <a:lnRef idx="1">
+            <a:schemeClr val="accent1"/>
+          </a:lnRef>
+          <a:fillRef idx="3">
+            <a:schemeClr val="accent1"/>
+          </a:fillRef>
+          <a:effectRef idx="2">
+            <a:schemeClr val="accent1"/>
+          </a:effectRef>
+          <a:fontRef idx="minor">
+            <a:schemeClr val="lt1"/>
+          </a:fontRef>
+        </p:style>
+        <p:txBody>
+          <a:bodyPr rtlCol="0" anchor="ctr"/>
+          <a:lstStyle/>
+          <a:p>
+            <a:pPr algn="ctr"/>
+          </a:p>
+        </p:txBody>
+      </p:sp>
+      <p:sp>
+        <p:nvSpPr>
+          <p:cNvPr id="5" name="Rectangle 4"/>
+          <p:cNvSpPr/>
+          <p:nvPr/>
+        </p:nvSpPr>
+        <p:spPr>
+          <a:xfrm>
+            <a:off x="0" y="0"/>
+            <a:ext cx="73152" cy="6858000"/>
+          </a:xfrm>
+          <a:prstGeom prst="rect">
+            <a:avLst/>
+          </a:prstGeom>
+          <a:solidFill>
+            <a:srgbClr val="6366F1"/>
+          </a:solidFill>
+          <a:ln>
+            <a:noFill/>
+          </a:ln>
+        </p:spPr>
+        <p:style>
+          <a:lnRef idx="1">
+            <a:schemeClr val="accent1"/>
+          </a:lnRef>
+          <a:fillRef idx="3">
+            <a:schemeClr val="accent1"/>
+          </a:fillRef>
+          <a:effectRef idx="2">
+            <a:schemeClr val="accent1"/>
+          </a:effectRef>
+          <a:fontRef idx="minor">
+            <a:schemeClr val="lt1"/>
+          </a:fontRef>
+        </p:style>
+        <p:txBody>
+          <a:bodyPr rtlCol="0" anchor="ctr"/>
+          <a:lstStyle/>
+          <a:p>
+            <a:pPr algn="ctr"/>
+          </a:p>
+        </p:txBody>
+      </p:sp>
+      <p:sp>
+        <p:nvSpPr>
+          <p:cNvPr id="6" name="Oval 5"/>
+          <p:cNvSpPr/>
+          <p:nvPr/>
+        </p:nvSpPr>
+        <p:spPr>
+          <a:xfrm>
+            <a:off x="8229600" y="-914400"/>
+            <a:ext cx="4572000" cy="4572000"/>
+          </a:xfrm>
+          <a:prstGeom prst="ellipse">
+            <a:avLst/>
+          </a:prstGeom>
+          <a:solidFill>
+            <a:srgbClr val="6366F1">
+              <a:lumMod val="70000"/>
+              <a:lumOff val="30000"/>
+            </a:srgbClr>
+          </a:solidFill>
+          <a:ln>
+            <a:noFill/>
+          </a:ln>
+        </p:spPr>
+        <p:style>
+          <a:lnRef idx="1">
+            <a:schemeClr val="accent1"/>
+          </a:lnRef>
+          <a:fillRef idx="3">
+            <a:schemeClr val="accent1"/>
+          </a:fillRef>
+          <a:effectRef idx="2">
+            <a:schemeClr val="accent1"/>
+          </a:effectRef>
+          <a:fontRef idx="minor">
+            <a:schemeClr val="lt1"/>
+          </a:fontRef>
+        </p:style>
+        <p:txBody>
+          <a:bodyPr rtlCol="0" anchor="ctr"/>
+          <a:lstStyle/>
+          <a:p>
+            <a:pPr algn="ctr"/>
+          </a:p>
+        </p:txBody>
+      </p:sp>
+      <p:sp>
+        <p:nvSpPr>
+          <p:cNvPr id="7" name="Oval 6"/>
+          <p:cNvSpPr/>
+          <p:nvPr/>
+        </p:nvSpPr>
+        <p:spPr>
+          <a:xfrm>
+            <a:off x="-914400" y="3657600"/>
+            <a:ext cx="3657600" cy="3657600"/>
+          </a:xfrm>
+          <a:prstGeom prst="ellipse">
+            <a:avLst/>
+          </a:prstGeom>
+          <a:solidFill>
+            <a:srgbClr val="5046E5">
+              <a:lumMod val="60000"/>
+              <a:lumOff val="40000"/>
+            </a:srgbClr>
+          </a:solidFill>
+          <a:ln>
+            <a:noFill/>
+          </a:ln>
+        </p:spPr>
+        <p:style>
+          <a:lnRef idx="1">
+            <a:schemeClr val="accent1"/>
+          </a:lnRef>
+          <a:fillRef idx="3">
+            <a:schemeClr val="accent1"/>
+          </a:fillRef>
+          <a:effectRef idx="2">
+            <a:schemeClr val="accent1"/>
+          </a:effectRef>
+          <a:fontRef idx="minor">
+            <a:schemeClr val="lt1"/>
+          </a:fontRef>
+        </p:style>
+        <p:txBody>
+          <a:bodyPr rtlCol="0" anchor="ctr"/>
+          <a:lstStyle/>
+          <a:p>
+            <a:pPr algn="ctr"/>
+          </a:p>
+        </p:txBody>
+      </p:sp>
+      <p:sp>
+        <p:nvSpPr>
+          <p:cNvPr id="8" name="Rounded Rectangle 7"/>
+          <p:cNvSpPr/>
+          <p:nvPr/>
+        </p:nvSpPr>
+        <p:spPr>
+          <a:xfrm>
+            <a:off x="914400" y="1371600"/>
+            <a:ext cx="2377440" cy="438912"/>
+          </a:xfrm>
+          <a:prstGeom prst="roundRect">
+            <a:avLst/>
+          </a:prstGeom>
+          <a:solidFill>
+            <a:srgbClr val="312E81"/>
+          </a:solidFill>
+          <a:ln>
+            <a:noFill/>
+          </a:ln>
+        </p:spPr>
+        <p:style>
+          <a:lnRef idx="1">
+            <a:schemeClr val="accent1"/>
+          </a:lnRef>
+          <a:fillRef idx="3">
+            <a:schemeClr val="accent1"/>
+          </a:fillRef>
+          <a:effectRef idx="2">
+            <a:schemeClr val="accent1"/>
+          </a:effectRef>
+          <a:fontRef idx="minor">
+            <a:schemeClr val="lt1"/>
+          </a:fontRef>
+        </p:style>
+        <p:txBody>
+          <a:bodyPr rtlCol="0" anchor="ctr" lIns="137160"/>
+          <a:lstStyle/>
+          <a:p>
+            <a:pPr algn="l">
+              <a:defRPr sz="1400" b="1">
+                <a:solidFill>
+                  <a:srgbClr val="C7D2FE"/>
+                </a:solidFill>
+                <a:latin typeface="Consolas"/>
+              </a:defRPr>
+            </a:pPr>
+            <a:r>
+              <a:t>MODULE 7</a:t>
+            </a:r>
+          </a:p>
+        </p:txBody>
+      </p:sp>
+      <p:sp>
+        <p:nvSpPr>
+          <p:cNvPr id="9" name="TextBox 8"/>
           <p:cNvSpPr txBox="1"/>
           <p:nvPr/>
         </p:nvSpPr>
         <p:spPr>
           <a:xfrm>
-            <a:off x="914400" y="1097280"/>
-            <a:ext cx="10058400" cy="731520"/>
-          </a:xfrm>
-          <a:prstGeom prst="rect">
-            <a:avLst/>
-          </a:prstGeom>
-          <a:noFill/>
-        </p:spPr>
-        <p:txBody>
-          <a:bodyPr wrap="none">
-            <a:spAutoFit/>
-          </a:bodyPr>
-          <a:lstStyle/>
-          <a:p>
-            <a:pPr>
-              <a:defRPr sz="2000" b="1">
-                <a:solidFill>
-                  <a:srgbClr val="007BFF"/>
-                </a:solidFill>
-                <a:latin typeface="Calibri"/>
-              </a:defRPr>
-            </a:pPr>
-            <a:r>
-              <a:t>MODULE 7</a:t>
-            </a:r>
-          </a:p>
-        </p:txBody>
-      </p:sp>
-      <p:sp>
-        <p:nvSpPr>
-          <p:cNvPr id="4" name="TextBox 3"/>
-          <p:cNvSpPr txBox="1"/>
-          <p:nvPr/>
-        </p:nvSpPr>
-        <p:spPr>
-          <a:xfrm>
-            <a:off x="914400" y="2011680"/>
-            <a:ext cx="10058400" cy="1828800"/>
+            <a:off x="914400" y="2286000"/>
+            <a:ext cx="9144000" cy="2011680"/>
           </a:xfrm>
           <a:prstGeom prst="rect">
             <a:avLst/>
@@ -3208,12 +3444,12 @@
           </a:bodyPr>
           <a:lstStyle/>
           <a:p>
-            <a:pPr>
-              <a:defRPr sz="4400" b="1">
+            <a:pPr algn="l">
+              <a:defRPr sz="4000" b="1">
                 <a:solidFill>
                   <a:srgbClr val="FFFFFF"/>
                 </a:solidFill>
-                <a:latin typeface="Calibri"/>
+                <a:latin typeface="Inter"/>
               </a:defRPr>
             </a:pPr>
             <a:r>
@@ -3221,21 +3457,21 @@
             </a:r>
             <a:br/>
             <a:r>
-              <a:t>and Advanced Topics</a:t>
-            </a:r>
-          </a:p>
-        </p:txBody>
-      </p:sp>
-      <p:sp>
-        <p:nvSpPr>
-          <p:cNvPr id="5" name="TextBox 4"/>
+              <a:t>&amp; Advanced Topics</a:t>
+            </a:r>
+          </a:p>
+        </p:txBody>
+      </p:sp>
+      <p:sp>
+        <p:nvSpPr>
+          <p:cNvPr id="10" name="TextBox 9"/>
           <p:cNvSpPr txBox="1"/>
           <p:nvPr/>
         </p:nvSpPr>
         <p:spPr>
           <a:xfrm>
-            <a:off x="914400" y="4114800"/>
-            <a:ext cx="9144000" cy="1371600"/>
+            <a:off x="914400" y="4389120"/>
+            <a:ext cx="8686800" cy="1371600"/>
           </a:xfrm>
           <a:prstGeom prst="rect">
             <a:avLst/>
@@ -3248,30 +3484,30 @@
           </a:bodyPr>
           <a:lstStyle/>
           <a:p>
-            <a:pPr>
-              <a:defRPr sz="2200">
-                <a:solidFill>
-                  <a:srgbClr val="CCCCCC"/>
-                </a:solidFill>
-                <a:latin typeface="Calibri"/>
-              </a:defRPr>
-            </a:pPr>
-            <a:r>
-              <a:t>Balancing competing objectives and extending your designs</a:t>
-            </a:r>
-          </a:p>
-        </p:txBody>
-      </p:sp>
-      <p:sp>
-        <p:nvSpPr>
-          <p:cNvPr id="6" name="TextBox 5"/>
+            <a:pPr algn="l">
+              <a:defRPr sz="1900" b="0">
+                <a:solidFill>
+                  <a:srgbClr val="A5B4FC"/>
+                </a:solidFill>
+                <a:latin typeface="Inter"/>
+              </a:defRPr>
+            </a:pPr>
+            <a:r>
+              <a:t>Balancing competing objectives and extending designs</a:t>
+            </a:r>
+          </a:p>
+        </p:txBody>
+      </p:sp>
+      <p:sp>
+        <p:nvSpPr>
+          <p:cNvPr id="11" name="TextBox 10"/>
           <p:cNvSpPr txBox="1"/>
           <p:nvPr/>
         </p:nvSpPr>
         <p:spPr>
           <a:xfrm>
-            <a:off x="914400" y="6126480"/>
-            <a:ext cx="10058400" cy="457200"/>
+            <a:off x="731520" y="6400800"/>
+            <a:ext cx="10058400" cy="365760"/>
           </a:xfrm>
           <a:prstGeom prst="rect">
             <a:avLst/>
@@ -3284,16 +3520,16 @@
           </a:bodyPr>
           <a:lstStyle/>
           <a:p>
-            <a:pPr>
-              <a:defRPr sz="1200">
-                <a:solidFill>
-                  <a:srgbClr val="888888"/>
-                </a:solidFill>
-                <a:latin typeface="Calibri"/>
-              </a:defRPr>
-            </a:pPr>
-            <a:r>
-              <a:t>Copyright © 2026 Martin J. Gallagher. Licensed under GPL-3.0-or-later.</a:t>
+            <a:pPr algn="l">
+              <a:defRPr sz="1000" b="0">
+                <a:solidFill>
+                  <a:srgbClr val="6366F1"/>
+                </a:solidFill>
+                <a:latin typeface="Consolas"/>
+              </a:defRPr>
+            </a:pPr>
+            <a:r>
+              <a:t>© 2026 Martin J. Gallagher  |  GPL-3.0-or-later  |  doehelper.com</a:t>
             </a:r>
           </a:p>
         </p:txBody>
@@ -3312,7 +3548,7 @@
     <p:bg>
       <p:bgPr>
         <a:solidFill>
-          <a:srgbClr val="FFFFFF"/>
+          <a:srgbClr val="FAFAFA"/>
         </a:solidFill>
         <a:effectLst/>
       </p:bgPr>
@@ -3333,13 +3569,13 @@
         <p:spPr>
           <a:xfrm>
             <a:off x="0" y="0"/>
-            <a:ext cx="12191695" cy="54864"/>
+            <a:ext cx="12191695" cy="45720"/>
           </a:xfrm>
           <a:prstGeom prst="rect">
             <a:avLst/>
           </a:prstGeom>
           <a:solidFill>
-            <a:srgbClr val="00C853"/>
+            <a:srgbClr val="D97706"/>
           </a:solidFill>
           <a:ln>
             <a:noFill/>
@@ -3369,56 +3605,20 @@
       </p:sp>
       <p:sp>
         <p:nvSpPr>
-          <p:cNvPr id="3" name="TextBox 2"/>
-          <p:cNvSpPr txBox="1"/>
-          <p:nvPr/>
-        </p:nvSpPr>
-        <p:spPr>
-          <a:xfrm>
-            <a:off x="731520" y="365760"/>
-            <a:ext cx="10515600" cy="822960"/>
-          </a:xfrm>
-          <a:prstGeom prst="rect">
-            <a:avLst/>
-          </a:prstGeom>
-          <a:noFill/>
-        </p:spPr>
-        <p:txBody>
-          <a:bodyPr wrap="square">
-            <a:spAutoFit/>
-          </a:bodyPr>
-          <a:lstStyle/>
-          <a:p>
-            <a:pPr>
-              <a:defRPr sz="3000" b="1">
-                <a:solidFill>
-                  <a:srgbClr val="222222"/>
-                </a:solidFill>
-                <a:latin typeface="Calibri"/>
-              </a:defRPr>
-            </a:pPr>
-            <a:r>
-              <a:t>Power Analysis with doe-helper</a:t>
-            </a:r>
-          </a:p>
-        </p:txBody>
-      </p:sp>
-      <p:sp>
-        <p:nvSpPr>
-          <p:cNvPr id="4" name="Rounded Rectangle 3"/>
+          <p:cNvPr id="3" name="Rounded Rectangle 2"/>
           <p:cNvSpPr/>
           <p:nvPr/>
         </p:nvSpPr>
         <p:spPr>
           <a:xfrm>
-            <a:off x="731520" y="1371600"/>
-            <a:ext cx="10515600" cy="4114800"/>
+            <a:off x="548640" y="274320"/>
+            <a:ext cx="2194560" cy="457200"/>
           </a:xfrm>
           <a:prstGeom prst="roundRect">
             <a:avLst/>
           </a:prstGeom>
           <a:solidFill>
-            <a:srgbClr val="2D2D2D"/>
+            <a:srgbClr val="D97706"/>
           </a:solidFill>
           <a:ln>
             <a:noFill/>
@@ -3439,251 +3639,33 @@
           </a:fontRef>
         </p:style>
         <p:txBody>
-          <a:bodyPr rtlCol="0" anchor="ctr" wrap="square" lIns="274320" tIns="274320"/>
+          <a:bodyPr rtlCol="0" anchor="ctr"/>
           <a:lstStyle/>
           <a:p>
             <a:pPr algn="ctr">
-              <a:spcAft>
-                <a:spcPts val="200"/>
-              </a:spcAft>
-              <a:defRPr sz="1800">
-                <a:solidFill>
-                  <a:srgbClr val="D4D4D4"/>
+              <a:defRPr sz="1300" b="1">
+                <a:solidFill>
+                  <a:srgbClr val="FFFFFF"/>
                 </a:solidFill>
                 <a:latin typeface="Consolas"/>
               </a:defRPr>
             </a:pPr>
             <a:r>
-              <a:t>$ doe power experiment/</a:t>
-            </a:r>
-          </a:p>
-          <a:p>
-            <a:pPr>
-              <a:spcAft>
-                <a:spcPts val="200"/>
-              </a:spcAft>
-              <a:defRPr sz="1800">
-                <a:solidFill>
-                  <a:srgbClr val="D4D4D4"/>
-                </a:solidFill>
-                <a:latin typeface="Consolas"/>
-              </a:defRPr>
-            </a:pPr>
-          </a:p>
-          <a:p>
-            <a:pPr>
-              <a:spcAft>
-                <a:spcPts val="200"/>
-              </a:spcAft>
-              <a:defRPr sz="1800">
-                <a:solidFill>
-                  <a:srgbClr val="D4D4D4"/>
-                </a:solidFill>
-                <a:latin typeface="Consolas"/>
-              </a:defRPr>
-            </a:pPr>
-            <a:r>
-              <a:t>Power Analysis</a:t>
-            </a:r>
-          </a:p>
-          <a:p>
-            <a:pPr>
-              <a:spcAft>
-                <a:spcPts val="200"/>
-              </a:spcAft>
-              <a:defRPr sz="1800">
-                <a:solidFill>
-                  <a:srgbClr val="D4D4D4"/>
-                </a:solidFill>
-                <a:latin typeface="Consolas"/>
-              </a:defRPr>
-            </a:pPr>
-            <a:r>
-              <a:t>  Design:          full_factorial (2^3)</a:t>
-            </a:r>
-          </a:p>
-          <a:p>
-            <a:pPr>
-              <a:spcAft>
-                <a:spcPts val="200"/>
-              </a:spcAft>
-              <a:defRPr sz="1800">
-                <a:solidFill>
-                  <a:srgbClr val="D4D4D4"/>
-                </a:solidFill>
-                <a:latin typeface="Consolas"/>
-              </a:defRPr>
-            </a:pPr>
-            <a:r>
-              <a:t>  Runs:            8</a:t>
-            </a:r>
-          </a:p>
-          <a:p>
-            <a:pPr>
-              <a:spcAft>
-                <a:spcPts val="200"/>
-              </a:spcAft>
-              <a:defRPr sz="1800">
-                <a:solidFill>
-                  <a:srgbClr val="D4D4D4"/>
-                </a:solidFill>
-                <a:latin typeface="Consolas"/>
-              </a:defRPr>
-            </a:pPr>
-            <a:r>
-              <a:t>  Error estimate:  2.5 (from prior data or estimate)</a:t>
-            </a:r>
-          </a:p>
-          <a:p>
-            <a:pPr>
-              <a:spcAft>
-                <a:spcPts val="200"/>
-              </a:spcAft>
-              <a:defRPr sz="1800">
-                <a:solidFill>
-                  <a:srgbClr val="D4D4D4"/>
-                </a:solidFill>
-                <a:latin typeface="Consolas"/>
-              </a:defRPr>
-            </a:pPr>
-          </a:p>
-          <a:p>
-            <a:pPr>
-              <a:spcAft>
-                <a:spcPts val="200"/>
-              </a:spcAft>
-              <a:defRPr sz="1800">
-                <a:solidFill>
-                  <a:srgbClr val="D4D4D4"/>
-                </a:solidFill>
-                <a:latin typeface="Consolas"/>
-              </a:defRPr>
-            </a:pPr>
-            <a:r>
-              <a:t>  Detectable Effect Sizes (at 80% power, alpha=0.05):</a:t>
-            </a:r>
-          </a:p>
-          <a:p>
-            <a:pPr>
-              <a:spcAft>
-                <a:spcPts val="200"/>
-              </a:spcAft>
-              <a:defRPr sz="1800">
-                <a:solidFill>
-                  <a:srgbClr val="D4D4D4"/>
-                </a:solidFill>
-                <a:latin typeface="Consolas"/>
-              </a:defRPr>
-            </a:pPr>
-            <a:r>
-              <a:t>    Main effects:   3.2 units</a:t>
-            </a:r>
-          </a:p>
-          <a:p>
-            <a:pPr>
-              <a:spcAft>
-                <a:spcPts val="200"/>
-              </a:spcAft>
-              <a:defRPr sz="1800">
-                <a:solidFill>
-                  <a:srgbClr val="D4D4D4"/>
-                </a:solidFill>
-                <a:latin typeface="Consolas"/>
-              </a:defRPr>
-            </a:pPr>
-            <a:r>
-              <a:t>    2-factor int.:  3.2 units</a:t>
-            </a:r>
-          </a:p>
-          <a:p>
-            <a:pPr>
-              <a:spcAft>
-                <a:spcPts val="200"/>
-              </a:spcAft>
-              <a:defRPr sz="1800">
-                <a:solidFill>
-                  <a:srgbClr val="D4D4D4"/>
-                </a:solidFill>
-                <a:latin typeface="Consolas"/>
-              </a:defRPr>
-            </a:pPr>
-          </a:p>
-          <a:p>
-            <a:pPr>
-              <a:spcAft>
-                <a:spcPts val="200"/>
-              </a:spcAft>
-              <a:defRPr sz="1800">
-                <a:solidFill>
-                  <a:srgbClr val="D4D4D4"/>
-                </a:solidFill>
-                <a:latin typeface="Consolas"/>
-              </a:defRPr>
-            </a:pPr>
-            <a:r>
-              <a:t># Or specify a target effect size:</a:t>
-            </a:r>
-          </a:p>
-          <a:p>
-            <a:pPr>
-              <a:spcAft>
-                <a:spcPts val="200"/>
-              </a:spcAft>
-              <a:defRPr sz="1800">
-                <a:solidFill>
-                  <a:srgbClr val="D4D4D4"/>
-                </a:solidFill>
-                <a:latin typeface="Consolas"/>
-              </a:defRPr>
-            </a:pPr>
-            <a:r>
-              <a:t>$ doe power experiment/ --effect-size 5.0</a:t>
-            </a:r>
-          </a:p>
-          <a:p>
-            <a:pPr>
-              <a:spcAft>
-                <a:spcPts val="200"/>
-              </a:spcAft>
-              <a:defRPr sz="1800">
-                <a:solidFill>
-                  <a:srgbClr val="D4D4D4"/>
-                </a:solidFill>
-                <a:latin typeface="Consolas"/>
-              </a:defRPr>
-            </a:pPr>
-            <a:r>
-              <a:t>  Power: 0.95 for main effects</a:t>
-            </a:r>
-          </a:p>
-          <a:p>
-            <a:pPr>
-              <a:spcAft>
-                <a:spcPts val="200"/>
-              </a:spcAft>
-              <a:defRPr sz="1800">
-                <a:solidFill>
-                  <a:srgbClr val="D4D4D4"/>
-                </a:solidFill>
-                <a:latin typeface="Consolas"/>
-              </a:defRPr>
-            </a:pPr>
-            <a:r>
-              <a:t>  Power: 0.95 for 2-factor interactions</a:t>
-            </a:r>
-          </a:p>
-        </p:txBody>
-      </p:sp>
-      <p:sp>
-        <p:nvSpPr>
-          <p:cNvPr id="5" name="TextBox 4"/>
+              <a:t>HANDS-ON EXERCISE</a:t>
+            </a:r>
+          </a:p>
+        </p:txBody>
+      </p:sp>
+      <p:sp>
+        <p:nvSpPr>
+          <p:cNvPr id="4" name="TextBox 3"/>
           <p:cNvSpPr txBox="1"/>
           <p:nvPr/>
         </p:nvSpPr>
         <p:spPr>
           <a:xfrm>
-            <a:off x="731520" y="5760720"/>
-            <a:ext cx="10058400" cy="731520"/>
+            <a:off x="3017520" y="274320"/>
+            <a:ext cx="8229600" cy="548640"/>
           </a:xfrm>
           <a:prstGeom prst="rect">
             <a:avLst/>
@@ -3696,98 +3678,36 @@
           </a:bodyPr>
           <a:lstStyle/>
           <a:p>
-            <a:pPr>
-              <a:defRPr sz="1600" i="1">
-                <a:solidFill>
-                  <a:srgbClr val="666666"/>
-                </a:solidFill>
-                <a:latin typeface="Calibri"/>
-              </a:defRPr>
-            </a:pPr>
-            <a:r>
-              <a:t>Use power analysis to ensure your design can detect meaningful effects</a:t>
-            </a:r>
-          </a:p>
-        </p:txBody>
-      </p:sp>
-    </p:spTree>
-  </p:cSld>
-  <p:clrMapOvr>
-    <a:masterClrMapping/>
-  </p:clrMapOvr>
-</p:sld>
-</file>
-
-<file path=ppt/slides/slide11.xml><?xml version="1.0" encoding="utf-8"?>
-<p:sld xmlns:a="http://schemas.openxmlformats.org/drawingml/2006/main" xmlns:p="http://schemas.openxmlformats.org/presentationml/2006/main" xmlns:r="http://schemas.openxmlformats.org/officeDocument/2006/relationships">
-  <p:cSld>
-    <p:bg>
-      <p:bgPr>
-        <a:solidFill>
-          <a:srgbClr val="1A1A2E"/>
-        </a:solidFill>
-        <a:effectLst/>
-      </p:bgPr>
-    </p:bg>
-    <p:spTree>
-      <p:nvGrpSpPr>
-        <p:cNvPr id="1" name=""/>
-        <p:cNvGrpSpPr/>
-        <p:nvPr/>
-      </p:nvGrpSpPr>
-      <p:grpSpPr/>
-      <p:sp>
-        <p:nvSpPr>
-          <p:cNvPr id="2" name="TextBox 1"/>
-          <p:cNvSpPr txBox="1"/>
-          <p:nvPr/>
-        </p:nvSpPr>
-        <p:spPr>
-          <a:xfrm>
-            <a:off x="731520" y="457200"/>
-            <a:ext cx="10515600" cy="914400"/>
-          </a:xfrm>
-          <a:prstGeom prst="rect">
-            <a:avLst/>
-          </a:prstGeom>
-          <a:noFill/>
-        </p:spPr>
-        <p:txBody>
-          <a:bodyPr wrap="none">
-            <a:spAutoFit/>
-          </a:bodyPr>
-          <a:lstStyle/>
-          <a:p>
-            <a:pPr>
-              <a:defRPr sz="3400" b="1">
-                <a:solidFill>
-                  <a:srgbClr val="FFFFFF"/>
-                </a:solidFill>
-                <a:latin typeface="Calibri"/>
-              </a:defRPr>
-            </a:pPr>
-            <a:r>
-              <a:t>Key Takeaways</a:t>
-            </a:r>
-          </a:p>
-        </p:txBody>
-      </p:sp>
-      <p:sp>
-        <p:nvSpPr>
-          <p:cNvPr id="3" name="Rounded Rectangle 2"/>
+            <a:pPr algn="l">
+              <a:defRPr sz="2600" b="1">
+                <a:solidFill>
+                  <a:srgbClr val="111111"/>
+                </a:solidFill>
+                <a:latin typeface="Inter"/>
+              </a:defRPr>
+            </a:pPr>
+            <a:r>
+              <a:t>Exercise 7: Multi-Response Optimisation</a:t>
+            </a:r>
+          </a:p>
+        </p:txBody>
+      </p:sp>
+      <p:sp>
+        <p:nvSpPr>
+          <p:cNvPr id="5" name="Rounded Rectangle 4"/>
           <p:cNvSpPr/>
           <p:nvPr/>
         </p:nvSpPr>
         <p:spPr>
           <a:xfrm>
-            <a:off x="731520" y="1645920"/>
-            <a:ext cx="10515600" cy="822960"/>
+            <a:off x="548640" y="1005840"/>
+            <a:ext cx="10972800" cy="5120640"/>
           </a:xfrm>
           <a:prstGeom prst="roundRect">
             <a:avLst/>
           </a:prstGeom>
           <a:solidFill>
-            <a:srgbClr val="2A2A4A"/>
+            <a:srgbClr val="FFFBEB"/>
           </a:solidFill>
           <a:ln>
             <a:noFill/>
@@ -3808,39 +3728,29 @@
           </a:fontRef>
         </p:style>
         <p:txBody>
-          <a:bodyPr rtlCol="0" anchor="ctr" lIns="274320"/>
-          <a:lstStyle/>
-          <a:p>
-            <a:pPr algn="ctr">
-              <a:defRPr sz="2200">
-                <a:solidFill>
-                  <a:srgbClr val="FFFFFF"/>
-                </a:solidFill>
-                <a:latin typeface="Calibri"/>
-              </a:defRPr>
-            </a:pPr>
-            <a:r>
-              <a:t>Multi-response: desirability functions balance trade-offs</a:t>
-            </a:r>
-          </a:p>
-        </p:txBody>
-      </p:sp>
-      <p:sp>
-        <p:nvSpPr>
-          <p:cNvPr id="4" name="Rounded Rectangle 3"/>
+          <a:bodyPr rtlCol="0" anchor="ctr"/>
+          <a:lstStyle/>
+          <a:p>
+            <a:pPr algn="ctr"/>
+          </a:p>
+        </p:txBody>
+      </p:sp>
+      <p:sp>
+        <p:nvSpPr>
+          <p:cNvPr id="6" name="Rectangle 5"/>
           <p:cNvSpPr/>
           <p:nvPr/>
         </p:nvSpPr>
         <p:spPr>
           <a:xfrm>
-            <a:off x="731520" y="2606040"/>
-            <a:ext cx="10515600" cy="822960"/>
-          </a:xfrm>
-          <a:prstGeom prst="roundRect">
+            <a:off x="548640" y="1005840"/>
+            <a:ext cx="36576" cy="5120640"/>
+          </a:xfrm>
+          <a:prstGeom prst="rect">
             <a:avLst/>
           </a:prstGeom>
           <a:solidFill>
-            <a:srgbClr val="2A2A4A"/>
+            <a:srgbClr val="D97706"/>
           </a:solidFill>
           <a:ln>
             <a:noFill/>
@@ -3861,244 +3771,6 @@
           </a:fontRef>
         </p:style>
         <p:txBody>
-          <a:bodyPr rtlCol="0" anchor="ctr" lIns="274320"/>
-          <a:lstStyle/>
-          <a:p>
-            <a:pPr algn="ctr">
-              <a:defRPr sz="2200">
-                <a:solidFill>
-                  <a:srgbClr val="FFFFFF"/>
-                </a:solidFill>
-                <a:latin typeface="Calibri"/>
-              </a:defRPr>
-            </a:pPr>
-            <a:r>
-              <a:t>doe augment extends designs without starting over</a:t>
-            </a:r>
-          </a:p>
-        </p:txBody>
-      </p:sp>
-      <p:sp>
-        <p:nvSpPr>
-          <p:cNvPr id="5" name="Rounded Rectangle 4"/>
-          <p:cNvSpPr/>
-          <p:nvPr/>
-        </p:nvSpPr>
-        <p:spPr>
-          <a:xfrm>
-            <a:off x="731520" y="3566160"/>
-            <a:ext cx="10515600" cy="822960"/>
-          </a:xfrm>
-          <a:prstGeom prst="roundRect">
-            <a:avLst/>
-          </a:prstGeom>
-          <a:solidFill>
-            <a:srgbClr val="2A2A4A"/>
-          </a:solidFill>
-          <a:ln>
-            <a:noFill/>
-          </a:ln>
-        </p:spPr>
-        <p:style>
-          <a:lnRef idx="1">
-            <a:schemeClr val="accent1"/>
-          </a:lnRef>
-          <a:fillRef idx="3">
-            <a:schemeClr val="accent1"/>
-          </a:fillRef>
-          <a:effectRef idx="2">
-            <a:schemeClr val="accent1"/>
-          </a:effectRef>
-          <a:fontRef idx="minor">
-            <a:schemeClr val="lt1"/>
-          </a:fontRef>
-        </p:style>
-        <p:txBody>
-          <a:bodyPr rtlCol="0" anchor="ctr" lIns="274320"/>
-          <a:lstStyle/>
-          <a:p>
-            <a:pPr algn="ctr">
-              <a:defRPr sz="2200">
-                <a:solidFill>
-                  <a:srgbClr val="FFFFFF"/>
-                </a:solidFill>
-                <a:latin typeface="Calibri"/>
-              </a:defRPr>
-            </a:pPr>
-            <a:r>
-              <a:t>Blocking removes nuisance variation systematically</a:t>
-            </a:r>
-          </a:p>
-        </p:txBody>
-      </p:sp>
-      <p:sp>
-        <p:nvSpPr>
-          <p:cNvPr id="6" name="Rounded Rectangle 5"/>
-          <p:cNvSpPr/>
-          <p:nvPr/>
-        </p:nvSpPr>
-        <p:spPr>
-          <a:xfrm>
-            <a:off x="731520" y="4526280"/>
-            <a:ext cx="10515600" cy="822960"/>
-          </a:xfrm>
-          <a:prstGeom prst="roundRect">
-            <a:avLst/>
-          </a:prstGeom>
-          <a:solidFill>
-            <a:srgbClr val="2A2A4A"/>
-          </a:solidFill>
-          <a:ln>
-            <a:noFill/>
-          </a:ln>
-        </p:spPr>
-        <p:style>
-          <a:lnRef idx="1">
-            <a:schemeClr val="accent1"/>
-          </a:lnRef>
-          <a:fillRef idx="3">
-            <a:schemeClr val="accent1"/>
-          </a:fillRef>
-          <a:effectRef idx="2">
-            <a:schemeClr val="accent1"/>
-          </a:effectRef>
-          <a:fontRef idx="minor">
-            <a:schemeClr val="lt1"/>
-          </a:fontRef>
-        </p:style>
-        <p:txBody>
-          <a:bodyPr rtlCol="0" anchor="ctr" lIns="274320"/>
-          <a:lstStyle/>
-          <a:p>
-            <a:pPr algn="ctr">
-              <a:defRPr sz="2200">
-                <a:solidFill>
-                  <a:srgbClr val="FFFFFF"/>
-                </a:solidFill>
-                <a:latin typeface="Calibri"/>
-              </a:defRPr>
-            </a:pPr>
-            <a:r>
-              <a:t>Taguchi designs optimise for robustness to noise</a:t>
-            </a:r>
-          </a:p>
-        </p:txBody>
-      </p:sp>
-      <p:sp>
-        <p:nvSpPr>
-          <p:cNvPr id="7" name="Rounded Rectangle 6"/>
-          <p:cNvSpPr/>
-          <p:nvPr/>
-        </p:nvSpPr>
-        <p:spPr>
-          <a:xfrm>
-            <a:off x="731520" y="5486400"/>
-            <a:ext cx="10515600" cy="822960"/>
-          </a:xfrm>
-          <a:prstGeom prst="roundRect">
-            <a:avLst/>
-          </a:prstGeom>
-          <a:solidFill>
-            <a:srgbClr val="2A2A4A"/>
-          </a:solidFill>
-          <a:ln>
-            <a:noFill/>
-          </a:ln>
-        </p:spPr>
-        <p:style>
-          <a:lnRef idx="1">
-            <a:schemeClr val="accent1"/>
-          </a:lnRef>
-          <a:fillRef idx="3">
-            <a:schemeClr val="accent1"/>
-          </a:fillRef>
-          <a:effectRef idx="2">
-            <a:schemeClr val="accent1"/>
-          </a:effectRef>
-          <a:fontRef idx="minor">
-            <a:schemeClr val="lt1"/>
-          </a:fontRef>
-        </p:style>
-        <p:txBody>
-          <a:bodyPr rtlCol="0" anchor="ctr" lIns="274320"/>
-          <a:lstStyle/>
-          <a:p>
-            <a:pPr algn="ctr">
-              <a:defRPr sz="2200">
-                <a:solidFill>
-                  <a:srgbClr val="FFFFFF"/>
-                </a:solidFill>
-                <a:latin typeface="Calibri"/>
-              </a:defRPr>
-            </a:pPr>
-            <a:r>
-              <a:t>D-Optimal handles constraints and irregular spaces</a:t>
-            </a:r>
-          </a:p>
-        </p:txBody>
-      </p:sp>
-    </p:spTree>
-  </p:cSld>
-  <p:clrMapOvr>
-    <a:masterClrMapping/>
-  </p:clrMapOvr>
-</p:sld>
-</file>
-
-<file path=ppt/slides/slide12.xml><?xml version="1.0" encoding="utf-8"?>
-<p:sld xmlns:a="http://schemas.openxmlformats.org/drawingml/2006/main" xmlns:p="http://schemas.openxmlformats.org/presentationml/2006/main" xmlns:r="http://schemas.openxmlformats.org/officeDocument/2006/relationships">
-  <p:cSld>
-    <p:bg>
-      <p:bgPr>
-        <a:solidFill>
-          <a:srgbClr val="FFFFFF"/>
-        </a:solidFill>
-        <a:effectLst/>
-      </p:bgPr>
-    </p:bg>
-    <p:spTree>
-      <p:nvGrpSpPr>
-        <p:cNvPr id="1" name=""/>
-        <p:cNvGrpSpPr/>
-        <p:nvPr/>
-      </p:nvGrpSpPr>
-      <p:grpSpPr/>
-      <p:sp>
-        <p:nvSpPr>
-          <p:cNvPr id="2" name="Rectangle 1"/>
-          <p:cNvSpPr/>
-          <p:nvPr/>
-        </p:nvSpPr>
-        <p:spPr>
-          <a:xfrm>
-            <a:off x="0" y="0"/>
-            <a:ext cx="12191695" cy="54864"/>
-          </a:xfrm>
-          <a:prstGeom prst="rect">
-            <a:avLst/>
-          </a:prstGeom>
-          <a:solidFill>
-            <a:srgbClr val="FF8C00"/>
-          </a:solidFill>
-          <a:ln>
-            <a:noFill/>
-          </a:ln>
-        </p:spPr>
-        <p:style>
-          <a:lnRef idx="1">
-            <a:schemeClr val="accent1"/>
-          </a:lnRef>
-          <a:fillRef idx="3">
-            <a:schemeClr val="accent1"/>
-          </a:fillRef>
-          <a:effectRef idx="2">
-            <a:schemeClr val="accent1"/>
-          </a:effectRef>
-          <a:fontRef idx="minor">
-            <a:schemeClr val="lt1"/>
-          </a:fontRef>
-        </p:style>
-        <p:txBody>
           <a:bodyPr rtlCol="0" anchor="ctr"/>
           <a:lstStyle/>
           <a:p>
@@ -4108,103 +3780,14 @@
       </p:sp>
       <p:sp>
         <p:nvSpPr>
-          <p:cNvPr id="3" name="Rounded Rectangle 2"/>
-          <p:cNvSpPr/>
-          <p:nvPr/>
-        </p:nvSpPr>
-        <p:spPr>
-          <a:xfrm>
-            <a:off x="731520" y="320040"/>
-            <a:ext cx="2011680" cy="502920"/>
-          </a:xfrm>
-          <a:prstGeom prst="roundRect">
-            <a:avLst/>
-          </a:prstGeom>
-          <a:solidFill>
-            <a:srgbClr val="FF8C00"/>
-          </a:solidFill>
-          <a:ln>
-            <a:noFill/>
-          </a:ln>
-        </p:spPr>
-        <p:style>
-          <a:lnRef idx="1">
-            <a:schemeClr val="accent1"/>
-          </a:lnRef>
-          <a:fillRef idx="3">
-            <a:schemeClr val="accent1"/>
-          </a:fillRef>
-          <a:effectRef idx="2">
-            <a:schemeClr val="accent1"/>
-          </a:effectRef>
-          <a:fontRef idx="minor">
-            <a:schemeClr val="lt1"/>
-          </a:fontRef>
-        </p:style>
-        <p:txBody>
-          <a:bodyPr rtlCol="0" anchor="ctr"/>
-          <a:lstStyle/>
-          <a:p>
-            <a:pPr algn="ctr">
-              <a:defRPr sz="1400" b="1">
-                <a:solidFill>
-                  <a:srgbClr val="FFFFFF"/>
-                </a:solidFill>
-                <a:latin typeface="Calibri"/>
-              </a:defRPr>
-            </a:pPr>
-            <a:r>
-              <a:t>HANDS-ON EXERCISE</a:t>
-            </a:r>
-          </a:p>
-        </p:txBody>
-      </p:sp>
-      <p:sp>
-        <p:nvSpPr>
-          <p:cNvPr id="4" name="TextBox 3"/>
+          <p:cNvPr id="7" name="TextBox 6"/>
           <p:cNvSpPr txBox="1"/>
           <p:nvPr/>
         </p:nvSpPr>
         <p:spPr>
           <a:xfrm>
-            <a:off x="3017520" y="320040"/>
-            <a:ext cx="8229600" cy="731520"/>
-          </a:xfrm>
-          <a:prstGeom prst="rect">
-            <a:avLst/>
-          </a:prstGeom>
-          <a:noFill/>
-        </p:spPr>
-        <p:txBody>
-          <a:bodyPr wrap="none">
-            <a:spAutoFit/>
-          </a:bodyPr>
-          <a:lstStyle/>
-          <a:p>
-            <a:pPr>
-              <a:defRPr sz="3000" b="1">
-                <a:solidFill>
-                  <a:srgbClr val="222222"/>
-                </a:solidFill>
-                <a:latin typeface="Calibri"/>
-              </a:defRPr>
-            </a:pPr>
-            <a:r>
-              <a:t>Exercise 7: Multi-Response Optimisation</a:t>
-            </a:r>
-          </a:p>
-        </p:txBody>
-      </p:sp>
-      <p:sp>
-        <p:nvSpPr>
-          <p:cNvPr id="5" name="TextBox 4"/>
-          <p:cNvSpPr txBox="1"/>
-          <p:nvPr/>
-        </p:nvSpPr>
-        <p:spPr>
-          <a:xfrm>
-            <a:off x="914400" y="1371600"/>
-            <a:ext cx="10058400" cy="5029200"/>
+            <a:off x="822960" y="1143000"/>
+            <a:ext cx="10424160" cy="4846320"/>
           </a:xfrm>
           <a:prstGeom prst="rect">
             <a:avLst/>
@@ -4219,29 +3802,29 @@
           <a:p>
             <a:pPr>
               <a:spcAft>
-                <a:spcPts val="600"/>
+                <a:spcPts val="500"/>
               </a:spcAft>
-              <a:defRPr sz="2000">
-                <a:solidFill>
-                  <a:srgbClr val="222222"/>
-                </a:solidFill>
-                <a:latin typeface="Calibri"/>
-              </a:defRPr>
-            </a:pPr>
-            <a:r>
-              <a:t>1. Modify the reactor experiment to have 3 responses:</a:t>
+              <a:defRPr sz="1700">
+                <a:solidFill>
+                  <a:srgbClr val="333333"/>
+                </a:solidFill>
+                <a:latin typeface="Inter"/>
+              </a:defRPr>
+            </a:pPr>
+            <a:r>
+              <a:t>1. Add 3 responses to the reactor experiment:</a:t>
             </a:r>
           </a:p>
           <a:p>
             <a:pPr lvl="1">
               <a:spcAft>
-                <a:spcPts val="600"/>
+                <a:spcPts val="500"/>
               </a:spcAft>
-              <a:defRPr sz="1800">
-                <a:solidFill>
-                  <a:srgbClr val="222222"/>
-                </a:solidFill>
-                <a:latin typeface="Calibri"/>
+              <a:defRPr sz="1500">
+                <a:solidFill>
+                  <a:srgbClr val="666666"/>
+                </a:solidFill>
+                <a:latin typeface="Inter"/>
               </a:defRPr>
             </a:pPr>
             <a:r>
@@ -4251,161 +3834,149 @@
           <a:p>
             <a:pPr>
               <a:spcAft>
-                <a:spcPts val="600"/>
+                <a:spcPts val="500"/>
               </a:spcAft>
-              <a:defRPr sz="2000">
-                <a:solidFill>
-                  <a:srgbClr val="222222"/>
-                </a:solidFill>
-                <a:latin typeface="Calibri"/>
-              </a:defRPr>
-            </a:pPr>
-            <a:r>
-              <a:t>2. Run: doe generate reactor_multi/</a:t>
+              <a:defRPr sz="1700">
+                <a:solidFill>
+                  <a:srgbClr val="333333"/>
+                </a:solidFill>
+                <a:latin typeface="Inter"/>
+              </a:defRPr>
+            </a:pPr>
+            <a:r>
+              <a:t>2. Run:  doe optimize reactor_multi/</a:t>
+            </a:r>
+          </a:p>
+          <a:p>
+            <a:pPr lvl="1">
+              <a:spcAft>
+                <a:spcPts val="500"/>
+              </a:spcAft>
+              <a:defRPr sz="1500">
+                <a:solidFill>
+                  <a:srgbClr val="666666"/>
+                </a:solidFill>
+                <a:latin typeface="Inter"/>
+              </a:defRPr>
+            </a:pPr>
+            <a:r>
+              <a:t>What is the overall desirability score?</a:t>
+            </a:r>
+          </a:p>
+          <a:p>
+            <a:pPr lvl="1">
+              <a:spcAft>
+                <a:spcPts val="500"/>
+              </a:spcAft>
+              <a:defRPr sz="1500">
+                <a:solidFill>
+                  <a:srgbClr val="666666"/>
+                </a:solidFill>
+                <a:latin typeface="Inter"/>
+              </a:defRPr>
+            </a:pPr>
+            <a:r>
+              <a:t>Which response is most compromised?</a:t>
             </a:r>
           </a:p>
           <a:p>
             <a:pPr>
               <a:spcAft>
-                <a:spcPts val="600"/>
+                <a:spcPts val="500"/>
               </a:spcAft>
-              <a:defRPr sz="2000">
-                <a:solidFill>
-                  <a:srgbClr val="222222"/>
-                </a:solidFill>
-                <a:latin typeface="Calibri"/>
-              </a:defRPr>
-            </a:pPr>
-            <a:r>
-              <a:t>3. Run the simulation and collect results</a:t>
+              <a:defRPr sz="1700">
+                <a:solidFill>
+                  <a:srgbClr val="333333"/>
+                </a:solidFill>
+                <a:latin typeface="Inter"/>
+              </a:defRPr>
+            </a:pPr>
+            <a:r>
+              <a:t>3. Run:  doe power reactor_multi/</a:t>
+            </a:r>
+          </a:p>
+          <a:p>
+            <a:pPr lvl="1">
+              <a:spcAft>
+                <a:spcPts val="500"/>
+              </a:spcAft>
+              <a:defRPr sz="1500">
+                <a:solidFill>
+                  <a:srgbClr val="666666"/>
+                </a:solidFill>
+                <a:latin typeface="Inter"/>
+              </a:defRPr>
+            </a:pPr>
+            <a:r>
+              <a:t>Is the design adequately powered?</a:t>
             </a:r>
           </a:p>
           <a:p>
             <a:pPr>
               <a:spcAft>
-                <a:spcPts val="600"/>
+                <a:spcPts val="500"/>
               </a:spcAft>
-              <a:defRPr sz="2000">
-                <a:solidFill>
-                  <a:srgbClr val="222222"/>
-                </a:solidFill>
-                <a:latin typeface="Calibri"/>
-              </a:defRPr>
-            </a:pPr>
-            <a:r>
-              <a:t>4. Run: doe analyze reactor_multi/</a:t>
-            </a:r>
-          </a:p>
-          <a:p>
-            <a:pPr>
-              <a:spcAft>
-                <a:spcPts val="600"/>
-              </a:spcAft>
-              <a:defRPr sz="2000">
-                <a:solidFill>
-                  <a:srgbClr val="222222"/>
-                </a:solidFill>
-                <a:latin typeface="Calibri"/>
-              </a:defRPr>
-            </a:pPr>
-            <a:r>
-              <a:t>5. Run: doe optimize reactor_multi/</a:t>
+              <a:defRPr sz="1700">
+                <a:solidFill>
+                  <a:srgbClr val="333333"/>
+                </a:solidFill>
+                <a:latin typeface="Inter"/>
+              </a:defRPr>
+            </a:pPr>
+            <a:r>
+              <a:t>4. Try:  doe augment reactor_multi/ --method center-points --count 4</a:t>
             </a:r>
           </a:p>
           <a:p>
             <a:pPr lvl="1">
               <a:spcAft>
-                <a:spcPts val="600"/>
+                <a:spcPts val="500"/>
               </a:spcAft>
-              <a:defRPr sz="1800">
-                <a:solidFill>
-                  <a:srgbClr val="222222"/>
-                </a:solidFill>
-                <a:latin typeface="Calibri"/>
-              </a:defRPr>
-            </a:pPr>
-            <a:r>
-              <a:t>What is the overall desirability score?</a:t>
-            </a:r>
-          </a:p>
-          <a:p>
-            <a:pPr lvl="1">
-              <a:spcAft>
-                <a:spcPts val="600"/>
-              </a:spcAft>
-              <a:defRPr sz="1800">
-                <a:solidFill>
-                  <a:srgbClr val="222222"/>
-                </a:solidFill>
-                <a:latin typeface="Calibri"/>
-              </a:defRPr>
-            </a:pPr>
-            <a:r>
-              <a:t>How do the optimal settings differ from single-response?</a:t>
-            </a:r>
-          </a:p>
-          <a:p>
-            <a:pPr>
-              <a:spcAft>
-                <a:spcPts val="600"/>
-              </a:spcAft>
-              <a:defRPr sz="2000">
-                <a:solidFill>
-                  <a:srgbClr val="222222"/>
-                </a:solidFill>
-                <a:latin typeface="Calibri"/>
-              </a:defRPr>
-            </a:pPr>
-            <a:r>
-              <a:t>6. Run: doe power reactor_multi/</a:t>
-            </a:r>
-          </a:p>
-          <a:p>
-            <a:pPr lvl="1">
-              <a:spcAft>
-                <a:spcPts val="600"/>
-              </a:spcAft>
-              <a:defRPr sz="1800">
-                <a:solidFill>
-                  <a:srgbClr val="222222"/>
-                </a:solidFill>
-                <a:latin typeface="Calibri"/>
-              </a:defRPr>
-            </a:pPr>
-            <a:r>
-              <a:t>Is the design adequately powered for all responses?</a:t>
-            </a:r>
-          </a:p>
-          <a:p>
-            <a:pPr>
-              <a:spcAft>
-                <a:spcPts val="600"/>
-              </a:spcAft>
-              <a:defRPr sz="2000">
-                <a:solidFill>
-                  <a:srgbClr val="222222"/>
-                </a:solidFill>
-                <a:latin typeface="Calibri"/>
-              </a:defRPr>
-            </a:pPr>
-            <a:r>
-              <a:t>7. Try: doe augment reactor_multi/ --method center-points --count 4</a:t>
-            </a:r>
-          </a:p>
-          <a:p>
-            <a:pPr lvl="1">
-              <a:spcAft>
-                <a:spcPts val="600"/>
-              </a:spcAft>
-              <a:defRPr sz="1800">
-                <a:solidFill>
-                  <a:srgbClr val="222222"/>
-                </a:solidFill>
-                <a:latin typeface="Calibri"/>
-              </a:defRPr>
-            </a:pPr>
-            <a:r>
-              <a:t>How does this change the power analysis?</a:t>
+              <a:defRPr sz="1500">
+                <a:solidFill>
+                  <a:srgbClr val="666666"/>
+                </a:solidFill>
+                <a:latin typeface="Inter"/>
+              </a:defRPr>
+            </a:pPr>
+            <a:r>
+              <a:t>How does augmentation change the power analysis?</a:t>
+            </a:r>
+          </a:p>
+        </p:txBody>
+      </p:sp>
+      <p:sp>
+        <p:nvSpPr>
+          <p:cNvPr id="8" name="TextBox 7"/>
+          <p:cNvSpPr txBox="1"/>
+          <p:nvPr/>
+        </p:nvSpPr>
+        <p:spPr>
+          <a:xfrm>
+            <a:off x="731520" y="6400800"/>
+            <a:ext cx="10058400" cy="365760"/>
+          </a:xfrm>
+          <a:prstGeom prst="rect">
+            <a:avLst/>
+          </a:prstGeom>
+          <a:noFill/>
+        </p:spPr>
+        <p:txBody>
+          <a:bodyPr wrap="square">
+            <a:spAutoFit/>
+          </a:bodyPr>
+          <a:lstStyle/>
+          <a:p>
+            <a:pPr algn="l">
+              <a:defRPr sz="1000" b="0">
+                <a:solidFill>
+                  <a:srgbClr val="999999"/>
+                </a:solidFill>
+                <a:latin typeface="Consolas"/>
+              </a:defRPr>
+            </a:pPr>
+            <a:r>
+              <a:t>© 2026 Martin J. Gallagher  |  GPL-3.0-or-later  |  doehelper.com</a:t>
             </a:r>
           </a:p>
         </p:txBody>
@@ -4424,7 +3995,7 @@
     <p:bg>
       <p:bgPr>
         <a:solidFill>
-          <a:srgbClr val="FFFFFF"/>
+          <a:srgbClr val="FAFAFA"/>
         </a:solidFill>
         <a:effectLst/>
       </p:bgPr>
@@ -4445,13 +4016,13 @@
         <p:spPr>
           <a:xfrm>
             <a:off x="0" y="0"/>
-            <a:ext cx="12191695" cy="54864"/>
+            <a:ext cx="12191695" cy="45720"/>
           </a:xfrm>
           <a:prstGeom prst="rect">
             <a:avLst/>
           </a:prstGeom>
           <a:solidFill>
-            <a:srgbClr val="007BFF"/>
+            <a:srgbClr val="5046E5"/>
           </a:solidFill>
           <a:ln>
             <a:noFill/>
@@ -4481,14 +4052,57 @@
       </p:sp>
       <p:sp>
         <p:nvSpPr>
-          <p:cNvPr id="3" name="TextBox 2"/>
+          <p:cNvPr id="3" name="Rectangle 2"/>
+          <p:cNvSpPr/>
+          <p:nvPr/>
+        </p:nvSpPr>
+        <p:spPr>
+          <a:xfrm>
+            <a:off x="548640" y="411480"/>
+            <a:ext cx="36576" cy="502920"/>
+          </a:xfrm>
+          <a:prstGeom prst="rect">
+            <a:avLst/>
+          </a:prstGeom>
+          <a:solidFill>
+            <a:srgbClr val="5046E5"/>
+          </a:solidFill>
+          <a:ln>
+            <a:noFill/>
+          </a:ln>
+        </p:spPr>
+        <p:style>
+          <a:lnRef idx="1">
+            <a:schemeClr val="accent1"/>
+          </a:lnRef>
+          <a:fillRef idx="3">
+            <a:schemeClr val="accent1"/>
+          </a:fillRef>
+          <a:effectRef idx="2">
+            <a:schemeClr val="accent1"/>
+          </a:effectRef>
+          <a:fontRef idx="minor">
+            <a:schemeClr val="lt1"/>
+          </a:fontRef>
+        </p:style>
+        <p:txBody>
+          <a:bodyPr rtlCol="0" anchor="ctr"/>
+          <a:lstStyle/>
+          <a:p>
+            <a:pPr algn="ctr"/>
+          </a:p>
+        </p:txBody>
+      </p:sp>
+      <p:sp>
+        <p:nvSpPr>
+          <p:cNvPr id="4" name="TextBox 3"/>
           <p:cNvSpPr txBox="1"/>
           <p:nvPr/>
         </p:nvSpPr>
         <p:spPr>
           <a:xfrm>
-            <a:off x="731520" y="365760"/>
-            <a:ext cx="10515600" cy="822960"/>
+            <a:off x="777240" y="365760"/>
+            <a:ext cx="10058400" cy="640080"/>
           </a:xfrm>
           <a:prstGeom prst="rect">
             <a:avLst/>
@@ -4501,12 +4115,12 @@
           </a:bodyPr>
           <a:lstStyle/>
           <a:p>
-            <a:pPr>
-              <a:defRPr sz="3200" b="1">
-                <a:solidFill>
-                  <a:srgbClr val="222222"/>
-                </a:solidFill>
-                <a:latin typeface="Calibri"/>
+            <a:pPr algn="l">
+              <a:defRPr sz="2800" b="1">
+                <a:solidFill>
+                  <a:srgbClr val="111111"/>
+                </a:solidFill>
+                <a:latin typeface="Inter"/>
               </a:defRPr>
             </a:pPr>
             <a:r>
@@ -4517,14 +4131,14 @@
       </p:sp>
       <p:sp>
         <p:nvSpPr>
-          <p:cNvPr id="4" name="TextBox 3"/>
+          <p:cNvPr id="5" name="TextBox 4"/>
           <p:cNvSpPr txBox="1"/>
           <p:nvPr/>
         </p:nvSpPr>
         <p:spPr>
           <a:xfrm>
-            <a:off x="914400" y="1463040"/>
-            <a:ext cx="10058400" cy="4754880"/>
+            <a:off x="822960" y="1188720"/>
+            <a:ext cx="10241280" cy="5120640"/>
           </a:xfrm>
           <a:prstGeom prst="rect">
             <a:avLst/>
@@ -4539,13 +4153,13 @@
           <a:p>
             <a:pPr>
               <a:spcAft>
-                <a:spcPts val="800"/>
+                <a:spcPts val="600"/>
               </a:spcAft>
-              <a:defRPr sz="2200" b="0">
-                <a:solidFill>
-                  <a:srgbClr val="222222"/>
-                </a:solidFill>
-                <a:latin typeface="Calibri"/>
+              <a:defRPr sz="1900">
+                <a:solidFill>
+                  <a:srgbClr val="333333"/>
+                </a:solidFill>
+                <a:latin typeface="Inter"/>
               </a:defRPr>
             </a:pPr>
             <a:r>
@@ -4555,13 +4169,13 @@
           <a:p>
             <a:pPr>
               <a:spcAft>
-                <a:spcPts val="800"/>
+                <a:spcPts val="600"/>
               </a:spcAft>
-              <a:defRPr sz="2200" b="0">
-                <a:solidFill>
-                  <a:srgbClr val="222222"/>
-                </a:solidFill>
-                <a:latin typeface="Calibri"/>
+              <a:defRPr sz="1900">
+                <a:solidFill>
+                  <a:srgbClr val="333333"/>
+                </a:solidFill>
+                <a:latin typeface="Inter"/>
               </a:defRPr>
             </a:pPr>
             <a:r>
@@ -4571,13 +4185,13 @@
           <a:p>
             <a:pPr>
               <a:spcAft>
-                <a:spcPts val="800"/>
+                <a:spcPts val="600"/>
               </a:spcAft>
-              <a:defRPr sz="2200" b="0">
-                <a:solidFill>
-                  <a:srgbClr val="222222"/>
-                </a:solidFill>
-                <a:latin typeface="Calibri"/>
+              <a:defRPr sz="1900">
+                <a:solidFill>
+                  <a:srgbClr val="333333"/>
+                </a:solidFill>
+                <a:latin typeface="Inter"/>
               </a:defRPr>
             </a:pPr>
             <a:r>
@@ -4587,13 +4201,13 @@
           <a:p>
             <a:pPr>
               <a:spcAft>
-                <a:spcPts val="800"/>
+                <a:spcPts val="600"/>
               </a:spcAft>
-              <a:defRPr sz="2200" b="0">
-                <a:solidFill>
-                  <a:srgbClr val="222222"/>
-                </a:solidFill>
-                <a:latin typeface="Calibri"/>
+              <a:defRPr sz="1900">
+                <a:solidFill>
+                  <a:srgbClr val="333333"/>
+                </a:solidFill>
+                <a:latin typeface="Inter"/>
               </a:defRPr>
             </a:pPr>
             <a:r>
@@ -4603,13 +4217,13 @@
           <a:p>
             <a:pPr>
               <a:spcAft>
-                <a:spcPts val="800"/>
+                <a:spcPts val="600"/>
               </a:spcAft>
-              <a:defRPr sz="2200" b="0">
-                <a:solidFill>
-                  <a:srgbClr val="222222"/>
-                </a:solidFill>
-                <a:latin typeface="Calibri"/>
+              <a:defRPr sz="1900">
+                <a:solidFill>
+                  <a:srgbClr val="333333"/>
+                </a:solidFill>
+                <a:latin typeface="Inter"/>
               </a:defRPr>
             </a:pPr>
             <a:r>
@@ -4619,17 +4233,53 @@
           <a:p>
             <a:pPr>
               <a:spcAft>
-                <a:spcPts val="800"/>
+                <a:spcPts val="600"/>
               </a:spcAft>
-              <a:defRPr sz="2200" b="0">
-                <a:solidFill>
-                  <a:srgbClr val="222222"/>
-                </a:solidFill>
-                <a:latin typeface="Calibri"/>
+              <a:defRPr sz="1900">
+                <a:solidFill>
+                  <a:srgbClr val="333333"/>
+                </a:solidFill>
+                <a:latin typeface="Inter"/>
               </a:defRPr>
             </a:pPr>
             <a:r>
               <a:t>Handle mixture experiments</a:t>
+            </a:r>
+          </a:p>
+        </p:txBody>
+      </p:sp>
+      <p:sp>
+        <p:nvSpPr>
+          <p:cNvPr id="6" name="TextBox 5"/>
+          <p:cNvSpPr txBox="1"/>
+          <p:nvPr/>
+        </p:nvSpPr>
+        <p:spPr>
+          <a:xfrm>
+            <a:off x="731520" y="6400800"/>
+            <a:ext cx="10058400" cy="365760"/>
+          </a:xfrm>
+          <a:prstGeom prst="rect">
+            <a:avLst/>
+          </a:prstGeom>
+          <a:noFill/>
+        </p:spPr>
+        <p:txBody>
+          <a:bodyPr wrap="square">
+            <a:spAutoFit/>
+          </a:bodyPr>
+          <a:lstStyle/>
+          <a:p>
+            <a:pPr algn="l">
+              <a:defRPr sz="1000" b="0">
+                <a:solidFill>
+                  <a:srgbClr val="999999"/>
+                </a:solidFill>
+                <a:latin typeface="Consolas"/>
+              </a:defRPr>
+            </a:pPr>
+            <a:r>
+              <a:t>© 2026 Martin J. Gallagher  |  GPL-3.0-or-later  |  doehelper.com</a:t>
             </a:r>
           </a:p>
         </p:txBody>
@@ -4648,7 +4298,7 @@
     <p:bg>
       <p:bgPr>
         <a:solidFill>
-          <a:srgbClr val="FFFFFF"/>
+          <a:srgbClr val="FAFAFA"/>
         </a:solidFill>
         <a:effectLst/>
       </p:bgPr>
@@ -4669,13 +4319,13 @@
         <p:spPr>
           <a:xfrm>
             <a:off x="0" y="0"/>
-            <a:ext cx="12191695" cy="54864"/>
+            <a:ext cx="12191695" cy="45720"/>
           </a:xfrm>
           <a:prstGeom prst="rect">
             <a:avLst/>
           </a:prstGeom>
           <a:solidFill>
-            <a:srgbClr val="007BFF"/>
+            <a:srgbClr val="5046E5"/>
           </a:solidFill>
           <a:ln>
             <a:noFill/>
@@ -4705,14 +4355,57 @@
       </p:sp>
       <p:sp>
         <p:nvSpPr>
-          <p:cNvPr id="3" name="TextBox 2"/>
+          <p:cNvPr id="3" name="Rectangle 2"/>
+          <p:cNvSpPr/>
+          <p:nvPr/>
+        </p:nvSpPr>
+        <p:spPr>
+          <a:xfrm>
+            <a:off x="548640" y="411480"/>
+            <a:ext cx="36576" cy="502920"/>
+          </a:xfrm>
+          <a:prstGeom prst="rect">
+            <a:avLst/>
+          </a:prstGeom>
+          <a:solidFill>
+            <a:srgbClr val="5046E5"/>
+          </a:solidFill>
+          <a:ln>
+            <a:noFill/>
+          </a:ln>
+        </p:spPr>
+        <p:style>
+          <a:lnRef idx="1">
+            <a:schemeClr val="accent1"/>
+          </a:lnRef>
+          <a:fillRef idx="3">
+            <a:schemeClr val="accent1"/>
+          </a:fillRef>
+          <a:effectRef idx="2">
+            <a:schemeClr val="accent1"/>
+          </a:effectRef>
+          <a:fontRef idx="minor">
+            <a:schemeClr val="lt1"/>
+          </a:fontRef>
+        </p:style>
+        <p:txBody>
+          <a:bodyPr rtlCol="0" anchor="ctr"/>
+          <a:lstStyle/>
+          <a:p>
+            <a:pPr algn="ctr"/>
+          </a:p>
+        </p:txBody>
+      </p:sp>
+      <p:sp>
+        <p:nvSpPr>
+          <p:cNvPr id="4" name="TextBox 3"/>
           <p:cNvSpPr txBox="1"/>
           <p:nvPr/>
         </p:nvSpPr>
         <p:spPr>
           <a:xfrm>
-            <a:off x="731520" y="365760"/>
-            <a:ext cx="10515600" cy="822960"/>
+            <a:off x="777240" y="365760"/>
+            <a:ext cx="10058400" cy="640080"/>
           </a:xfrm>
           <a:prstGeom prst="rect">
             <a:avLst/>
@@ -4725,12 +4418,12 @@
           </a:bodyPr>
           <a:lstStyle/>
           <a:p>
-            <a:pPr>
-              <a:defRPr sz="3200" b="1">
-                <a:solidFill>
-                  <a:srgbClr val="222222"/>
-                </a:solidFill>
-                <a:latin typeface="Calibri"/>
+            <a:pPr algn="l">
+              <a:defRPr sz="2800" b="1">
+                <a:solidFill>
+                  <a:srgbClr val="111111"/>
+                </a:solidFill>
+                <a:latin typeface="Inter"/>
               </a:defRPr>
             </a:pPr>
             <a:r>
@@ -4741,14 +4434,14 @@
       </p:sp>
       <p:sp>
         <p:nvSpPr>
-          <p:cNvPr id="4" name="TextBox 3"/>
+          <p:cNvPr id="5" name="TextBox 4"/>
           <p:cNvSpPr txBox="1"/>
           <p:nvPr/>
         </p:nvSpPr>
         <p:spPr>
           <a:xfrm>
-            <a:off x="914400" y="1463040"/>
-            <a:ext cx="10058400" cy="4754880"/>
+            <a:off x="822960" y="1188720"/>
+            <a:ext cx="10241280" cy="5120640"/>
           </a:xfrm>
           <a:prstGeom prst="rect">
             <a:avLst/>
@@ -4763,13 +4456,13 @@
           <a:p>
             <a:pPr>
               <a:spcAft>
-                <a:spcPts val="800"/>
+                <a:spcPts val="600"/>
               </a:spcAft>
-              <a:defRPr sz="2200" b="0">
-                <a:solidFill>
-                  <a:srgbClr val="222222"/>
-                </a:solidFill>
-                <a:latin typeface="Calibri"/>
+              <a:defRPr sz="1900">
+                <a:solidFill>
+                  <a:srgbClr val="333333"/>
+                </a:solidFill>
+                <a:latin typeface="Inter"/>
               </a:defRPr>
             </a:pPr>
             <a:r>
@@ -4779,113 +4472,149 @@
           <a:p>
             <a:pPr lvl="1">
               <a:spcAft>
-                <a:spcPts val="800"/>
+                <a:spcPts val="600"/>
+              </a:spcAft>
+              <a:defRPr sz="1700">
+                <a:solidFill>
+                  <a:srgbClr val="666666"/>
+                </a:solidFill>
+                <a:latin typeface="Inter"/>
+              </a:defRPr>
+            </a:pPr>
+            <a:r>
+              <a:t>Maximise yield AND minimise cost</a:t>
+            </a:r>
+          </a:p>
+          <a:p>
+            <a:pPr lvl="1">
+              <a:spcAft>
+                <a:spcPts val="600"/>
+              </a:spcAft>
+              <a:defRPr sz="1700">
+                <a:solidFill>
+                  <a:srgbClr val="666666"/>
+                </a:solidFill>
+                <a:latin typeface="Inter"/>
+              </a:defRPr>
+            </a:pPr>
+            <a:r>
+              <a:t>Minimise latency AND maximise throughput</a:t>
+            </a:r>
+          </a:p>
+          <a:p>
+            <a:pPr>
+              <a:spcAft>
+                <a:spcPts val="600"/>
               </a:spcAft>
               <a:defRPr sz="1900">
                 <a:solidFill>
-                  <a:srgbClr val="222222"/>
-                </a:solidFill>
-                <a:latin typeface="Calibri"/>
-              </a:defRPr>
-            </a:pPr>
-            <a:r>
-              <a:t>Maximise yield AND minimise cost</a:t>
+                  <a:srgbClr val="333333"/>
+                </a:solidFill>
+                <a:latin typeface="Inter"/>
+              </a:defRPr>
+            </a:pPr>
+            <a:r>
+              <a:t>Responses often conflict: improving one degrades another</a:t>
+            </a:r>
+          </a:p>
+          <a:p>
+            <a:pPr>
+              <a:spcAft>
+                <a:spcPts val="600"/>
+              </a:spcAft>
+              <a:defRPr sz="1900">
+                <a:solidFill>
+                  <a:srgbClr val="333333"/>
+                </a:solidFill>
+                <a:latin typeface="Inter"/>
+              </a:defRPr>
+            </a:pPr>
+            <a:r>
+              <a:t>Derringer-Suich desirability function:</a:t>
             </a:r>
           </a:p>
           <a:p>
             <a:pPr lvl="1">
               <a:spcAft>
-                <a:spcPts val="800"/>
+                <a:spcPts val="600"/>
               </a:spcAft>
-              <a:defRPr sz="1900">
-                <a:solidFill>
-                  <a:srgbClr val="222222"/>
-                </a:solidFill>
-                <a:latin typeface="Calibri"/>
-              </a:defRPr>
-            </a:pPr>
-            <a:r>
-              <a:t>Minimise latency AND maximise throughput</a:t>
-            </a:r>
-          </a:p>
-          <a:p>
-            <a:pPr>
-              <a:spcAft>
-                <a:spcPts val="800"/>
-              </a:spcAft>
-              <a:defRPr sz="2200" b="0">
-                <a:solidFill>
-                  <a:srgbClr val="222222"/>
-                </a:solidFill>
-                <a:latin typeface="Calibri"/>
-              </a:defRPr>
-            </a:pPr>
-            <a:r>
-              <a:t>Responses often conflict: improving one degrades another</a:t>
-            </a:r>
-          </a:p>
-          <a:p>
-            <a:pPr>
-              <a:spcAft>
-                <a:spcPts val="800"/>
-              </a:spcAft>
-              <a:defRPr sz="2200" b="0">
-                <a:solidFill>
-                  <a:srgbClr val="222222"/>
-                </a:solidFill>
-                <a:latin typeface="Calibri"/>
-              </a:defRPr>
-            </a:pPr>
-            <a:r>
-              <a:t>Need a systematic way to balance trade-offs</a:t>
-            </a:r>
-          </a:p>
-          <a:p>
-            <a:pPr>
-              <a:spcAft>
-                <a:spcPts val="800"/>
-              </a:spcAft>
-              <a:defRPr sz="2200" b="0">
-                <a:solidFill>
-                  <a:srgbClr val="222222"/>
-                </a:solidFill>
-                <a:latin typeface="Calibri"/>
-              </a:defRPr>
-            </a:pPr>
-            <a:r>
-              <a:t>Derringer-Suich desirability function:</a:t>
+              <a:defRPr sz="1700">
+                <a:solidFill>
+                  <a:srgbClr val="666666"/>
+                </a:solidFill>
+                <a:latin typeface="Inter"/>
+              </a:defRPr>
+            </a:pPr>
+            <a:r>
+              <a:t>Transform each response to a 0–1 desirability scale</a:t>
             </a:r>
           </a:p>
           <a:p>
             <a:pPr lvl="1">
               <a:spcAft>
-                <a:spcPts val="800"/>
+                <a:spcPts val="600"/>
               </a:spcAft>
-              <a:defRPr sz="1900">
-                <a:solidFill>
-                  <a:srgbClr val="222222"/>
-                </a:solidFill>
-                <a:latin typeface="Calibri"/>
-              </a:defRPr>
-            </a:pPr>
-            <a:r>
-              <a:t>Transform each response to a 0-1 desirability scale</a:t>
+              <a:defRPr sz="1700">
+                <a:solidFill>
+                  <a:srgbClr val="666666"/>
+                </a:solidFill>
+                <a:latin typeface="Inter"/>
+              </a:defRPr>
+            </a:pPr>
+            <a:r>
+              <a:t>Overall D = geometric mean of individual dᵢ</a:t>
             </a:r>
           </a:p>
           <a:p>
             <a:pPr lvl="1">
               <a:spcAft>
-                <a:spcPts val="800"/>
+                <a:spcPts val="600"/>
               </a:spcAft>
-              <a:defRPr sz="1900">
-                <a:solidFill>
-                  <a:srgbClr val="222222"/>
-                </a:solidFill>
-                <a:latin typeface="Calibri"/>
-              </a:defRPr>
-            </a:pPr>
-            <a:r>
-              <a:t>Overall desirability D = geometric mean of individual d_i</a:t>
+              <a:defRPr sz="1700">
+                <a:solidFill>
+                  <a:srgbClr val="666666"/>
+                </a:solidFill>
+                <a:latin typeface="Inter"/>
+              </a:defRPr>
+            </a:pPr>
+            <a:r>
+              <a:t>D = 1: perfect  |  D = 0: unacceptable</a:t>
+            </a:r>
+          </a:p>
+        </p:txBody>
+      </p:sp>
+      <p:sp>
+        <p:nvSpPr>
+          <p:cNvPr id="6" name="TextBox 5"/>
+          <p:cNvSpPr txBox="1"/>
+          <p:nvPr/>
+        </p:nvSpPr>
+        <p:spPr>
+          <a:xfrm>
+            <a:off x="731520" y="6400800"/>
+            <a:ext cx="10058400" cy="365760"/>
+          </a:xfrm>
+          <a:prstGeom prst="rect">
+            <a:avLst/>
+          </a:prstGeom>
+          <a:noFill/>
+        </p:spPr>
+        <p:txBody>
+          <a:bodyPr wrap="square">
+            <a:spAutoFit/>
+          </a:bodyPr>
+          <a:lstStyle/>
+          <a:p>
+            <a:pPr algn="l">
+              <a:defRPr sz="1000" b="0">
+                <a:solidFill>
+                  <a:srgbClr val="999999"/>
+                </a:solidFill>
+                <a:latin typeface="Consolas"/>
+              </a:defRPr>
+            </a:pPr>
+            <a:r>
+              <a:t>© 2026 Martin J. Gallagher  |  GPL-3.0-or-later  |  doehelper.com</a:t>
             </a:r>
           </a:p>
         </p:txBody>
@@ -4904,7 +4633,7 @@
     <p:bg>
       <p:bgPr>
         <a:solidFill>
-          <a:srgbClr val="FFFFFF"/>
+          <a:srgbClr val="FAFAFA"/>
         </a:solidFill>
         <a:effectLst/>
       </p:bgPr>
@@ -4925,13 +4654,13 @@
         <p:spPr>
           <a:xfrm>
             <a:off x="0" y="0"/>
-            <a:ext cx="12191695" cy="54864"/>
+            <a:ext cx="12191695" cy="45720"/>
           </a:xfrm>
           <a:prstGeom prst="rect">
             <a:avLst/>
           </a:prstGeom>
           <a:solidFill>
-            <a:srgbClr val="00C853"/>
+            <a:srgbClr val="0D9488"/>
           </a:solidFill>
           <a:ln>
             <a:noFill/>
@@ -4967,8 +4696,8 @@
         </p:nvSpPr>
         <p:spPr>
           <a:xfrm>
-            <a:off x="731520" y="365760"/>
-            <a:ext cx="10515600" cy="822960"/>
+            <a:off x="777240" y="320040"/>
+            <a:ext cx="10058400" cy="548640"/>
           </a:xfrm>
           <a:prstGeom prst="rect">
             <a:avLst/>
@@ -4981,36 +4710,36 @@
           </a:bodyPr>
           <a:lstStyle/>
           <a:p>
-            <a:pPr>
-              <a:defRPr sz="3000" b="1">
-                <a:solidFill>
-                  <a:srgbClr val="222222"/>
-                </a:solidFill>
-                <a:latin typeface="Calibri"/>
-              </a:defRPr>
-            </a:pPr>
-            <a:r>
-              <a:t>Multi-Response Config</a:t>
-            </a:r>
-          </a:p>
-        </p:txBody>
-      </p:sp>
-      <p:sp>
-        <p:nvSpPr>
-          <p:cNvPr id="4" name="Rounded Rectangle 3"/>
+            <a:pPr algn="l">
+              <a:defRPr sz="2600" b="1">
+                <a:solidFill>
+                  <a:srgbClr val="111111"/>
+                </a:solidFill>
+                <a:latin typeface="Inter"/>
+              </a:defRPr>
+            </a:pPr>
+            <a:r>
+              <a:t>Multi-Response Config &amp; Optimization</a:t>
+            </a:r>
+          </a:p>
+        </p:txBody>
+      </p:sp>
+      <p:sp>
+        <p:nvSpPr>
+          <p:cNvPr id="4" name="Rectangle 3"/>
           <p:cNvSpPr/>
           <p:nvPr/>
         </p:nvSpPr>
         <p:spPr>
           <a:xfrm>
-            <a:off x="731520" y="1371600"/>
-            <a:ext cx="10515600" cy="4114800"/>
-          </a:xfrm>
-          <a:prstGeom prst="roundRect">
+            <a:off x="548640" y="1051560"/>
+            <a:ext cx="10972800" cy="320040"/>
+          </a:xfrm>
+          <a:prstGeom prst="rect">
             <a:avLst/>
           </a:prstGeom>
           <a:solidFill>
-            <a:srgbClr val="2D2D2D"/>
+            <a:srgbClr val="222222"/>
           </a:solidFill>
           <a:ln>
             <a:noFill/>
@@ -5031,276 +4760,10 @@
           </a:fontRef>
         </p:style>
         <p:txBody>
-          <a:bodyPr rtlCol="0" anchor="ctr" wrap="square" lIns="274320" tIns="274320"/>
-          <a:lstStyle/>
-          <a:p>
-            <a:pPr algn="ctr">
-              <a:spcAft>
-                <a:spcPts val="200"/>
-              </a:spcAft>
-              <a:defRPr sz="1800">
-                <a:solidFill>
-                  <a:srgbClr val="D4D4D4"/>
-                </a:solidFill>
-                <a:latin typeface="Consolas"/>
-              </a:defRPr>
-            </a:pPr>
-            <a:r>
-              <a:t>{</a:t>
-            </a:r>
-          </a:p>
-          <a:p>
-            <a:pPr>
-              <a:spcAft>
-                <a:spcPts val="200"/>
-              </a:spcAft>
-              <a:defRPr sz="1800">
-                <a:solidFill>
-                  <a:srgbClr val="D4D4D4"/>
-                </a:solidFill>
-                <a:latin typeface="Consolas"/>
-              </a:defRPr>
-            </a:pPr>
-            <a:r>
-              <a:t>  "factors": {</a:t>
-            </a:r>
-          </a:p>
-          <a:p>
-            <a:pPr>
-              <a:spcAft>
-                <a:spcPts val="200"/>
-              </a:spcAft>
-              <a:defRPr sz="1800">
-                <a:solidFill>
-                  <a:srgbClr val="D4D4D4"/>
-                </a:solidFill>
-                <a:latin typeface="Consolas"/>
-              </a:defRPr>
-            </a:pPr>
-            <a:r>
-              <a:t>    "temperature": {"low": 150, "high": 200, "units": "C"},</a:t>
-            </a:r>
-          </a:p>
-          <a:p>
-            <a:pPr>
-              <a:spcAft>
-                <a:spcPts val="200"/>
-              </a:spcAft>
-              <a:defRPr sz="1800">
-                <a:solidFill>
-                  <a:srgbClr val="D4D4D4"/>
-                </a:solidFill>
-                <a:latin typeface="Consolas"/>
-              </a:defRPr>
-            </a:pPr>
-            <a:r>
-              <a:t>    "pressure":    {"low": 1.0, "high": 5.0, "units": "bar"},</a:t>
-            </a:r>
-          </a:p>
-          <a:p>
-            <a:pPr>
-              <a:spcAft>
-                <a:spcPts val="200"/>
-              </a:spcAft>
-              <a:defRPr sz="1800">
-                <a:solidFill>
-                  <a:srgbClr val="D4D4D4"/>
-                </a:solidFill>
-                <a:latin typeface="Consolas"/>
-              </a:defRPr>
-            </a:pPr>
-            <a:r>
-              <a:t>    "catalyst":    {"low": 0.5, "high": 1.5, "units": "g"}</a:t>
-            </a:r>
-          </a:p>
-          <a:p>
-            <a:pPr>
-              <a:spcAft>
-                <a:spcPts val="200"/>
-              </a:spcAft>
-              <a:defRPr sz="1800">
-                <a:solidFill>
-                  <a:srgbClr val="D4D4D4"/>
-                </a:solidFill>
-                <a:latin typeface="Consolas"/>
-              </a:defRPr>
-            </a:pPr>
-            <a:r>
-              <a:t>  },</a:t>
-            </a:r>
-          </a:p>
-          <a:p>
-            <a:pPr>
-              <a:spcAft>
-                <a:spcPts val="200"/>
-              </a:spcAft>
-              <a:defRPr sz="1800">
-                <a:solidFill>
-                  <a:srgbClr val="D4D4D4"/>
-                </a:solidFill>
-                <a:latin typeface="Consolas"/>
-              </a:defRPr>
-            </a:pPr>
-            <a:r>
-              <a:t>  "responses": {</a:t>
-            </a:r>
-          </a:p>
-          <a:p>
-            <a:pPr>
-              <a:spcAft>
-                <a:spcPts val="200"/>
-              </a:spcAft>
-              <a:defRPr sz="1800">
-                <a:solidFill>
-                  <a:srgbClr val="D4D4D4"/>
-                </a:solidFill>
-                <a:latin typeface="Consolas"/>
-              </a:defRPr>
-            </a:pPr>
-            <a:r>
-              <a:t>    "yield":  {"units": "%",   "target": "maximize"},</a:t>
-            </a:r>
-          </a:p>
-          <a:p>
-            <a:pPr>
-              <a:spcAft>
-                <a:spcPts val="200"/>
-              </a:spcAft>
-              <a:defRPr sz="1800">
-                <a:solidFill>
-                  <a:srgbClr val="D4D4D4"/>
-                </a:solidFill>
-                <a:latin typeface="Consolas"/>
-              </a:defRPr>
-            </a:pPr>
-            <a:r>
-              <a:t>    "cost":   {"units": "USD", "target": "minimize"},</a:t>
-            </a:r>
-          </a:p>
-          <a:p>
-            <a:pPr>
-              <a:spcAft>
-                <a:spcPts val="200"/>
-              </a:spcAft>
-              <a:defRPr sz="1800">
-                <a:solidFill>
-                  <a:srgbClr val="D4D4D4"/>
-                </a:solidFill>
-                <a:latin typeface="Consolas"/>
-              </a:defRPr>
-            </a:pPr>
-            <a:r>
-              <a:t>    "purity": {"units": "%",   "target": 99.5}</a:t>
-            </a:r>
-          </a:p>
-          <a:p>
-            <a:pPr>
-              <a:spcAft>
-                <a:spcPts val="200"/>
-              </a:spcAft>
-              <a:defRPr sz="1800">
-                <a:solidFill>
-                  <a:srgbClr val="D4D4D4"/>
-                </a:solidFill>
-                <a:latin typeface="Consolas"/>
-              </a:defRPr>
-            </a:pPr>
-            <a:r>
-              <a:t>  },</a:t>
-            </a:r>
-          </a:p>
-          <a:p>
-            <a:pPr>
-              <a:spcAft>
-                <a:spcPts val="200"/>
-              </a:spcAft>
-              <a:defRPr sz="1800">
-                <a:solidFill>
-                  <a:srgbClr val="D4D4D4"/>
-                </a:solidFill>
-                <a:latin typeface="Consolas"/>
-              </a:defRPr>
-            </a:pPr>
-            <a:r>
-              <a:t>  "design": {"type": "ccd"}</a:t>
-            </a:r>
-          </a:p>
-          <a:p>
-            <a:pPr>
-              <a:spcAft>
-                <a:spcPts val="200"/>
-              </a:spcAft>
-              <a:defRPr sz="1800">
-                <a:solidFill>
-                  <a:srgbClr val="D4D4D4"/>
-                </a:solidFill>
-                <a:latin typeface="Consolas"/>
-              </a:defRPr>
-            </a:pPr>
-            <a:r>
-              <a:t>}</a:t>
-            </a:r>
-          </a:p>
-          <a:p>
-            <a:pPr>
-              <a:spcAft>
-                <a:spcPts val="200"/>
-              </a:spcAft>
-              <a:defRPr sz="1800">
-                <a:solidFill>
-                  <a:srgbClr val="D4D4D4"/>
-                </a:solidFill>
-                <a:latin typeface="Consolas"/>
-              </a:defRPr>
-            </a:pPr>
-          </a:p>
-          <a:p>
-            <a:pPr>
-              <a:spcAft>
-                <a:spcPts val="200"/>
-              </a:spcAft>
-              <a:defRPr sz="1800">
-                <a:solidFill>
-                  <a:srgbClr val="D4D4D4"/>
-                </a:solidFill>
-                <a:latin typeface="Consolas"/>
-              </a:defRPr>
-            </a:pPr>
-            <a:r>
-              <a:t>$ doe optimize reactor_multi/</a:t>
-            </a:r>
-          </a:p>
-          <a:p>
-            <a:pPr>
-              <a:spcAft>
-                <a:spcPts val="200"/>
-              </a:spcAft>
-              <a:defRPr sz="1800">
-                <a:solidFill>
-                  <a:srgbClr val="D4D4D4"/>
-                </a:solidFill>
-                <a:latin typeface="Consolas"/>
-              </a:defRPr>
-            </a:pPr>
-            <a:r>
-              <a:t>  Overall desirability: 0.87</a:t>
-            </a:r>
-          </a:p>
-          <a:p>
-            <a:pPr>
-              <a:spcAft>
-                <a:spcPts val="200"/>
-              </a:spcAft>
-              <a:defRPr sz="1800">
-                <a:solidFill>
-                  <a:srgbClr val="D4D4D4"/>
-                </a:solidFill>
-                <a:latin typeface="Consolas"/>
-              </a:defRPr>
-            </a:pPr>
-            <a:r>
-              <a:t>  yield=91.2%, cost=$42.30, purity=99.3%</a:t>
-            </a:r>
+          <a:bodyPr rtlCol="0" anchor="ctr"/>
+          <a:lstStyle/>
+          <a:p>
+            <a:pPr algn="ctr"/>
           </a:p>
         </p:txBody>
       </p:sp>
@@ -5312,8 +4775,286 @@
         </p:nvSpPr>
         <p:spPr>
           <a:xfrm>
-            <a:off x="731520" y="5760720"/>
-            <a:ext cx="10058400" cy="731520"/>
+            <a:off x="822960" y="1051560"/>
+            <a:ext cx="3657600" cy="320040"/>
+          </a:xfrm>
+          <a:prstGeom prst="rect">
+            <a:avLst/>
+          </a:prstGeom>
+          <a:noFill/>
+        </p:spPr>
+        <p:txBody>
+          <a:bodyPr wrap="square" anchor="ctr">
+            <a:spAutoFit/>
+          </a:bodyPr>
+          <a:lstStyle/>
+          <a:p>
+            <a:pPr algn="l">
+              <a:defRPr sz="1000" b="0">
+                <a:solidFill>
+                  <a:srgbClr val="999999"/>
+                </a:solidFill>
+                <a:latin typeface="Consolas"/>
+              </a:defRPr>
+            </a:pPr>
+            <a:r>
+              <a:t>terminal</a:t>
+            </a:r>
+          </a:p>
+        </p:txBody>
+      </p:sp>
+      <p:sp>
+        <p:nvSpPr>
+          <p:cNvPr id="6" name="Rounded Rectangle 5"/>
+          <p:cNvSpPr/>
+          <p:nvPr/>
+        </p:nvSpPr>
+        <p:spPr>
+          <a:xfrm>
+            <a:off x="548640" y="1371600"/>
+            <a:ext cx="10972800" cy="3931920"/>
+          </a:xfrm>
+          <a:prstGeom prst="roundRect">
+            <a:avLst/>
+          </a:prstGeom>
+          <a:solidFill>
+            <a:srgbClr val="1A1A1A"/>
+          </a:solidFill>
+          <a:ln>
+            <a:noFill/>
+          </a:ln>
+        </p:spPr>
+        <p:style>
+          <a:lnRef idx="1">
+            <a:schemeClr val="accent1"/>
+          </a:lnRef>
+          <a:fillRef idx="3">
+            <a:schemeClr val="accent1"/>
+          </a:fillRef>
+          <a:effectRef idx="2">
+            <a:schemeClr val="accent1"/>
+          </a:effectRef>
+          <a:fontRef idx="minor">
+            <a:schemeClr val="lt1"/>
+          </a:fontRef>
+        </p:style>
+        <p:txBody>
+          <a:bodyPr rtlCol="0" anchor="ctr" wrap="square" lIns="274320" tIns="182880" rIns="274320"/>
+          <a:lstStyle/>
+          <a:p>
+            <a:pPr algn="ctr">
+              <a:spcAft>
+                <a:spcPts val="100"/>
+              </a:spcAft>
+              <a:defRPr sz="1500">
+                <a:solidFill>
+                  <a:srgbClr val="CCCCCC"/>
+                </a:solidFill>
+                <a:latin typeface="Consolas"/>
+              </a:defRPr>
+            </a:pPr>
+            <a:r>
+              <a:t>{</a:t>
+            </a:r>
+          </a:p>
+          <a:p>
+            <a:pPr>
+              <a:spcAft>
+                <a:spcPts val="100"/>
+              </a:spcAft>
+              <a:defRPr sz="1500">
+                <a:solidFill>
+                  <a:srgbClr val="CCCCCC"/>
+                </a:solidFill>
+                <a:latin typeface="Consolas"/>
+              </a:defRPr>
+            </a:pPr>
+            <a:r>
+              <a:t>  "responses": {</a:t>
+            </a:r>
+          </a:p>
+          <a:p>
+            <a:pPr>
+              <a:spcAft>
+                <a:spcPts val="100"/>
+              </a:spcAft>
+              <a:defRPr sz="1500">
+                <a:solidFill>
+                  <a:srgbClr val="CCCCCC"/>
+                </a:solidFill>
+                <a:latin typeface="Consolas"/>
+              </a:defRPr>
+            </a:pPr>
+            <a:r>
+              <a:t>    "yield":  {"units": "%",   "target": "maximize"},</a:t>
+            </a:r>
+          </a:p>
+          <a:p>
+            <a:pPr>
+              <a:spcAft>
+                <a:spcPts val="100"/>
+              </a:spcAft>
+              <a:defRPr sz="1500">
+                <a:solidFill>
+                  <a:srgbClr val="CCCCCC"/>
+                </a:solidFill>
+                <a:latin typeface="Consolas"/>
+              </a:defRPr>
+            </a:pPr>
+            <a:r>
+              <a:t>    "cost":   {"units": "USD", "target": "minimize"},</a:t>
+            </a:r>
+          </a:p>
+          <a:p>
+            <a:pPr>
+              <a:spcAft>
+                <a:spcPts val="100"/>
+              </a:spcAft>
+              <a:defRPr sz="1500">
+                <a:solidFill>
+                  <a:srgbClr val="CCCCCC"/>
+                </a:solidFill>
+                <a:latin typeface="Consolas"/>
+              </a:defRPr>
+            </a:pPr>
+            <a:r>
+              <a:t>    "purity": {"units": "%",   "target": 99.5}</a:t>
+            </a:r>
+          </a:p>
+          <a:p>
+            <a:pPr>
+              <a:spcAft>
+                <a:spcPts val="100"/>
+              </a:spcAft>
+              <a:defRPr sz="1500">
+                <a:solidFill>
+                  <a:srgbClr val="CCCCCC"/>
+                </a:solidFill>
+                <a:latin typeface="Consolas"/>
+              </a:defRPr>
+            </a:pPr>
+            <a:r>
+              <a:t>  }</a:t>
+            </a:r>
+          </a:p>
+          <a:p>
+            <a:pPr>
+              <a:spcAft>
+                <a:spcPts val="100"/>
+              </a:spcAft>
+              <a:defRPr sz="1500">
+                <a:solidFill>
+                  <a:srgbClr val="CCCCCC"/>
+                </a:solidFill>
+                <a:latin typeface="Consolas"/>
+              </a:defRPr>
+            </a:pPr>
+            <a:r>
+              <a:t>}</a:t>
+            </a:r>
+          </a:p>
+          <a:p>
+            <a:pPr>
+              <a:spcAft>
+                <a:spcPts val="100"/>
+              </a:spcAft>
+              <a:defRPr sz="1500">
+                <a:solidFill>
+                  <a:srgbClr val="CCCCCC"/>
+                </a:solidFill>
+                <a:latin typeface="Consolas"/>
+              </a:defRPr>
+            </a:pPr>
+          </a:p>
+          <a:p>
+            <a:pPr>
+              <a:spcAft>
+                <a:spcPts val="100"/>
+              </a:spcAft>
+              <a:defRPr sz="1500">
+                <a:solidFill>
+                  <a:srgbClr val="6EC86E"/>
+                </a:solidFill>
+                <a:latin typeface="Consolas"/>
+              </a:defRPr>
+            </a:pPr>
+            <a:r>
+              <a:t>$ doe optimize reactor_multi/</a:t>
+            </a:r>
+          </a:p>
+          <a:p>
+            <a:pPr>
+              <a:spcAft>
+                <a:spcPts val="100"/>
+              </a:spcAft>
+              <a:defRPr sz="1500">
+                <a:solidFill>
+                  <a:srgbClr val="CCCCCC"/>
+                </a:solidFill>
+                <a:latin typeface="Consolas"/>
+              </a:defRPr>
+            </a:pPr>
+          </a:p>
+          <a:p>
+            <a:pPr>
+              <a:spcAft>
+                <a:spcPts val="100"/>
+              </a:spcAft>
+              <a:defRPr sz="1500">
+                <a:solidFill>
+                  <a:srgbClr val="CCCCCC"/>
+                </a:solidFill>
+                <a:latin typeface="Consolas"/>
+              </a:defRPr>
+            </a:pPr>
+            <a:r>
+              <a:t>Optimization Results:</a:t>
+            </a:r>
+          </a:p>
+          <a:p>
+            <a:pPr>
+              <a:spcAft>
+                <a:spcPts val="100"/>
+              </a:spcAft>
+              <a:defRPr sz="1500">
+                <a:solidFill>
+                  <a:srgbClr val="CCCCCC"/>
+                </a:solidFill>
+                <a:latin typeface="Consolas"/>
+              </a:defRPr>
+            </a:pPr>
+            <a:r>
+              <a:t>  yield=91.2%, cost=$42.30, purity=99.3%</a:t>
+            </a:r>
+          </a:p>
+          <a:p>
+            <a:pPr>
+              <a:spcAft>
+                <a:spcPts val="100"/>
+              </a:spcAft>
+              <a:defRPr sz="1500">
+                <a:solidFill>
+                  <a:srgbClr val="CCCCCC"/>
+                </a:solidFill>
+                <a:latin typeface="Consolas"/>
+              </a:defRPr>
+            </a:pPr>
+            <a:r>
+              <a:t>  Overall desirability: 0.87</a:t>
+            </a:r>
+          </a:p>
+        </p:txBody>
+      </p:sp>
+      <p:sp>
+        <p:nvSpPr>
+          <p:cNvPr id="7" name="TextBox 6"/>
+          <p:cNvSpPr txBox="1"/>
+          <p:nvPr/>
+        </p:nvSpPr>
+        <p:spPr>
+          <a:xfrm>
+            <a:off x="822960" y="5349240"/>
+            <a:ext cx="10058400" cy="640080"/>
           </a:xfrm>
           <a:prstGeom prst="rect">
             <a:avLst/>
@@ -5326,16 +5067,52 @@
           </a:bodyPr>
           <a:lstStyle/>
           <a:p>
-            <a:pPr>
-              <a:defRPr sz="1600" i="1">
+            <a:pPr algn="l">
+              <a:defRPr sz="1400" b="0">
                 <a:solidFill>
                   <a:srgbClr val="666666"/>
                 </a:solidFill>
-                <a:latin typeface="Calibri"/>
+                <a:latin typeface="Inter"/>
               </a:defRPr>
             </a:pPr>
             <a:r>
               <a:t>doe optimize balances all responses via desirability functions</a:t>
+            </a:r>
+          </a:p>
+        </p:txBody>
+      </p:sp>
+      <p:sp>
+        <p:nvSpPr>
+          <p:cNvPr id="8" name="TextBox 7"/>
+          <p:cNvSpPr txBox="1"/>
+          <p:nvPr/>
+        </p:nvSpPr>
+        <p:spPr>
+          <a:xfrm>
+            <a:off x="731520" y="6400800"/>
+            <a:ext cx="10058400" cy="365760"/>
+          </a:xfrm>
+          <a:prstGeom prst="rect">
+            <a:avLst/>
+          </a:prstGeom>
+          <a:noFill/>
+        </p:spPr>
+        <p:txBody>
+          <a:bodyPr wrap="square">
+            <a:spAutoFit/>
+          </a:bodyPr>
+          <a:lstStyle/>
+          <a:p>
+            <a:pPr algn="l">
+              <a:defRPr sz="1000" b="0">
+                <a:solidFill>
+                  <a:srgbClr val="999999"/>
+                </a:solidFill>
+                <a:latin typeface="Consolas"/>
+              </a:defRPr>
+            </a:pPr>
+            <a:r>
+              <a:t>© 2026 Martin J. Gallagher  |  GPL-3.0-or-later  |  doehelper.com</a:t>
             </a:r>
           </a:p>
         </p:txBody>
@@ -5354,7 +5131,7 @@
     <p:bg>
       <p:bgPr>
         <a:solidFill>
-          <a:srgbClr val="FFFFFF"/>
+          <a:srgbClr val="FAFAFA"/>
         </a:solidFill>
         <a:effectLst/>
       </p:bgPr>
@@ -5375,13 +5152,13 @@
         <p:spPr>
           <a:xfrm>
             <a:off x="0" y="0"/>
-            <a:ext cx="12191695" cy="54864"/>
+            <a:ext cx="12191695" cy="45720"/>
           </a:xfrm>
           <a:prstGeom prst="rect">
             <a:avLst/>
           </a:prstGeom>
           <a:solidFill>
-            <a:srgbClr val="007BFF"/>
+            <a:srgbClr val="5046E5"/>
           </a:solidFill>
           <a:ln>
             <a:noFill/>
@@ -5411,14 +5188,57 @@
       </p:sp>
       <p:sp>
         <p:nvSpPr>
-          <p:cNvPr id="3" name="TextBox 2"/>
+          <p:cNvPr id="3" name="Rectangle 2"/>
+          <p:cNvSpPr/>
+          <p:nvPr/>
+        </p:nvSpPr>
+        <p:spPr>
+          <a:xfrm>
+            <a:off x="548640" y="411480"/>
+            <a:ext cx="36576" cy="502920"/>
+          </a:xfrm>
+          <a:prstGeom prst="rect">
+            <a:avLst/>
+          </a:prstGeom>
+          <a:solidFill>
+            <a:srgbClr val="5046E5"/>
+          </a:solidFill>
+          <a:ln>
+            <a:noFill/>
+          </a:ln>
+        </p:spPr>
+        <p:style>
+          <a:lnRef idx="1">
+            <a:schemeClr val="accent1"/>
+          </a:lnRef>
+          <a:fillRef idx="3">
+            <a:schemeClr val="accent1"/>
+          </a:fillRef>
+          <a:effectRef idx="2">
+            <a:schemeClr val="accent1"/>
+          </a:effectRef>
+          <a:fontRef idx="minor">
+            <a:schemeClr val="lt1"/>
+          </a:fontRef>
+        </p:style>
+        <p:txBody>
+          <a:bodyPr rtlCol="0" anchor="ctr"/>
+          <a:lstStyle/>
+          <a:p>
+            <a:pPr algn="ctr"/>
+          </a:p>
+        </p:txBody>
+      </p:sp>
+      <p:sp>
+        <p:nvSpPr>
+          <p:cNvPr id="4" name="TextBox 3"/>
           <p:cNvSpPr txBox="1"/>
           <p:nvPr/>
         </p:nvSpPr>
         <p:spPr>
           <a:xfrm>
-            <a:off x="731520" y="365760"/>
-            <a:ext cx="10515600" cy="822960"/>
+            <a:off x="777240" y="365760"/>
+            <a:ext cx="10058400" cy="640080"/>
           </a:xfrm>
           <a:prstGeom prst="rect">
             <a:avLst/>
@@ -5431,12 +5251,12 @@
           </a:bodyPr>
           <a:lstStyle/>
           <a:p>
-            <a:pPr>
-              <a:defRPr sz="3200" b="1">
-                <a:solidFill>
-                  <a:srgbClr val="222222"/>
-                </a:solidFill>
-                <a:latin typeface="Calibri"/>
+            <a:pPr algn="l">
+              <a:defRPr sz="2800" b="1">
+                <a:solidFill>
+                  <a:srgbClr val="111111"/>
+                </a:solidFill>
+                <a:latin typeface="Inter"/>
               </a:defRPr>
             </a:pPr>
             <a:r>
@@ -5447,14 +5267,14 @@
       </p:sp>
       <p:sp>
         <p:nvSpPr>
-          <p:cNvPr id="4" name="TextBox 3"/>
+          <p:cNvPr id="5" name="TextBox 4"/>
           <p:cNvSpPr txBox="1"/>
           <p:nvPr/>
         </p:nvSpPr>
         <p:spPr>
           <a:xfrm>
-            <a:off x="914400" y="1463040"/>
-            <a:ext cx="10058400" cy="4754880"/>
+            <a:off x="822960" y="1188720"/>
+            <a:ext cx="10241280" cy="5120640"/>
           </a:xfrm>
           <a:prstGeom prst="rect">
             <a:avLst/>
@@ -5469,13 +5289,13 @@
           <a:p>
             <a:pPr>
               <a:spcAft>
-                <a:spcPts val="800"/>
+                <a:spcPts val="600"/>
               </a:spcAft>
-              <a:defRPr sz="2200" b="0">
-                <a:solidFill>
-                  <a:srgbClr val="222222"/>
-                </a:solidFill>
-                <a:latin typeface="Calibri"/>
+              <a:defRPr sz="1900">
+                <a:solidFill>
+                  <a:srgbClr val="333333"/>
+                </a:solidFill>
+                <a:latin typeface="Inter"/>
               </a:defRPr>
             </a:pPr>
             <a:r>
@@ -5485,13 +5305,13 @@
           <a:p>
             <a:pPr>
               <a:spcAft>
-                <a:spcPts val="800"/>
+                <a:spcPts val="600"/>
               </a:spcAft>
-              <a:defRPr sz="2200" b="0">
-                <a:solidFill>
-                  <a:srgbClr val="222222"/>
-                </a:solidFill>
-                <a:latin typeface="Calibri"/>
+              <a:defRPr sz="1900">
+                <a:solidFill>
+                  <a:srgbClr val="333333"/>
+                </a:solidFill>
+                <a:latin typeface="Inter"/>
               </a:defRPr>
             </a:pPr>
             <a:r>
@@ -5501,113 +5321,149 @@
           <a:p>
             <a:pPr lvl="1">
               <a:spcAft>
-                <a:spcPts val="800"/>
+                <a:spcPts val="600"/>
+              </a:spcAft>
+              <a:defRPr sz="1700">
+                <a:solidFill>
+                  <a:srgbClr val="666666"/>
+                </a:solidFill>
+                <a:latin typeface="Inter"/>
+              </a:defRPr>
+            </a:pPr>
+            <a:r>
+              <a:t>Fold-over: mirror design to break aliases</a:t>
+            </a:r>
+          </a:p>
+          <a:p>
+            <a:pPr lvl="1">
+              <a:spcAft>
+                <a:spcPts val="600"/>
+              </a:spcAft>
+              <a:defRPr sz="1700">
+                <a:solidFill>
+                  <a:srgbClr val="666666"/>
+                </a:solidFill>
+                <a:latin typeface="Inter"/>
+              </a:defRPr>
+            </a:pPr>
+            <a:r>
+              <a:t>Star points: add axial points for RSM</a:t>
+            </a:r>
+          </a:p>
+          <a:p>
+            <a:pPr lvl="1">
+              <a:spcAft>
+                <a:spcPts val="600"/>
+              </a:spcAft>
+              <a:defRPr sz="1700">
+                <a:solidFill>
+                  <a:srgbClr val="666666"/>
+                </a:solidFill>
+                <a:latin typeface="Inter"/>
+              </a:defRPr>
+            </a:pPr>
+            <a:r>
+              <a:t>Center points: add runs at the center</a:t>
+            </a:r>
+          </a:p>
+          <a:p>
+            <a:pPr>
+              <a:spcAft>
+                <a:spcPts val="600"/>
               </a:spcAft>
               <a:defRPr sz="1900">
                 <a:solidFill>
-                  <a:srgbClr val="222222"/>
-                </a:solidFill>
-                <a:latin typeface="Calibri"/>
-              </a:defRPr>
-            </a:pPr>
-            <a:r>
-              <a:t>Fold-over: mirror the design to break aliases</a:t>
+                  <a:srgbClr val="333333"/>
+                </a:solidFill>
+                <a:latin typeface="Inter"/>
+              </a:defRPr>
+            </a:pPr>
+            <a:r>
+              <a:t>Benefits:</a:t>
             </a:r>
           </a:p>
           <a:p>
             <a:pPr lvl="1">
               <a:spcAft>
-                <a:spcPts val="800"/>
+                <a:spcPts val="600"/>
               </a:spcAft>
-              <a:defRPr sz="1900">
-                <a:solidFill>
-                  <a:srgbClr val="222222"/>
-                </a:solidFill>
-                <a:latin typeface="Calibri"/>
-              </a:defRPr>
-            </a:pPr>
-            <a:r>
-              <a:t>Star points: add axial points for RSM</a:t>
+              <a:defRPr sz="1700">
+                <a:solidFill>
+                  <a:srgbClr val="666666"/>
+                </a:solidFill>
+                <a:latin typeface="Inter"/>
+              </a:defRPr>
+            </a:pPr>
+            <a:r>
+              <a:t>Leverages data you already have</a:t>
             </a:r>
           </a:p>
           <a:p>
             <a:pPr lvl="1">
               <a:spcAft>
-                <a:spcPts val="800"/>
+                <a:spcPts val="600"/>
               </a:spcAft>
-              <a:defRPr sz="1900">
-                <a:solidFill>
-                  <a:srgbClr val="222222"/>
-                </a:solidFill>
-                <a:latin typeface="Calibri"/>
-              </a:defRPr>
-            </a:pPr>
-            <a:r>
-              <a:t>Center points: add runs at the center</a:t>
-            </a:r>
-          </a:p>
-          <a:p>
-            <a:pPr>
-              <a:spcAft>
-                <a:spcPts val="800"/>
-              </a:spcAft>
-              <a:defRPr sz="2200" b="0">
-                <a:solidFill>
-                  <a:srgbClr val="222222"/>
-                </a:solidFill>
-                <a:latin typeface="Calibri"/>
-              </a:defRPr>
-            </a:pPr>
-            <a:r>
-              <a:t>Benefits:</a:t>
+              <a:defRPr sz="1700">
+                <a:solidFill>
+                  <a:srgbClr val="666666"/>
+                </a:solidFill>
+                <a:latin typeface="Inter"/>
+              </a:defRPr>
+            </a:pPr>
+            <a:r>
+              <a:t>Sequentially builds up information</a:t>
             </a:r>
           </a:p>
           <a:p>
             <a:pPr lvl="1">
               <a:spcAft>
-                <a:spcPts val="800"/>
+                <a:spcPts val="600"/>
               </a:spcAft>
-              <a:defRPr sz="1900">
-                <a:solidFill>
-                  <a:srgbClr val="222222"/>
-                </a:solidFill>
-                <a:latin typeface="Calibri"/>
-              </a:defRPr>
-            </a:pPr>
-            <a:r>
-              <a:t>Leverages data you already have</a:t>
-            </a:r>
-          </a:p>
-          <a:p>
-            <a:pPr lvl="1">
-              <a:spcAft>
-                <a:spcPts val="800"/>
-              </a:spcAft>
-              <a:defRPr sz="1900">
-                <a:solidFill>
-                  <a:srgbClr val="222222"/>
-                </a:solidFill>
-                <a:latin typeface="Calibri"/>
-              </a:defRPr>
-            </a:pPr>
-            <a:r>
-              <a:t>Sequentially builds up information</a:t>
-            </a:r>
-          </a:p>
-          <a:p>
-            <a:pPr lvl="1">
-              <a:spcAft>
-                <a:spcPts val="800"/>
-              </a:spcAft>
-              <a:defRPr sz="1900">
-                <a:solidFill>
-                  <a:srgbClr val="222222"/>
-                </a:solidFill>
-                <a:latin typeface="Calibri"/>
+              <a:defRPr sz="1700">
+                <a:solidFill>
+                  <a:srgbClr val="666666"/>
+                </a:solidFill>
+                <a:latin typeface="Inter"/>
               </a:defRPr>
             </a:pPr>
             <a:r>
               <a:t>No need to start over from scratch</a:t>
+            </a:r>
+          </a:p>
+        </p:txBody>
+      </p:sp>
+      <p:sp>
+        <p:nvSpPr>
+          <p:cNvPr id="6" name="TextBox 5"/>
+          <p:cNvSpPr txBox="1"/>
+          <p:nvPr/>
+        </p:nvSpPr>
+        <p:spPr>
+          <a:xfrm>
+            <a:off x="731520" y="6400800"/>
+            <a:ext cx="10058400" cy="365760"/>
+          </a:xfrm>
+          <a:prstGeom prst="rect">
+            <a:avLst/>
+          </a:prstGeom>
+          <a:noFill/>
+        </p:spPr>
+        <p:txBody>
+          <a:bodyPr wrap="square">
+            <a:spAutoFit/>
+          </a:bodyPr>
+          <a:lstStyle/>
+          <a:p>
+            <a:pPr algn="l">
+              <a:defRPr sz="1000" b="0">
+                <a:solidFill>
+                  <a:srgbClr val="999999"/>
+                </a:solidFill>
+                <a:latin typeface="Consolas"/>
+              </a:defRPr>
+            </a:pPr>
+            <a:r>
+              <a:t>© 2026 Martin J. Gallagher  |  GPL-3.0-or-later  |  doehelper.com</a:t>
             </a:r>
           </a:p>
         </p:txBody>
@@ -5626,7 +5482,7 @@
     <p:bg>
       <p:bgPr>
         <a:solidFill>
-          <a:srgbClr val="FFFFFF"/>
+          <a:srgbClr val="FAFAFA"/>
         </a:solidFill>
         <a:effectLst/>
       </p:bgPr>
@@ -5647,13 +5503,13 @@
         <p:spPr>
           <a:xfrm>
             <a:off x="0" y="0"/>
-            <a:ext cx="12191695" cy="54864"/>
+            <a:ext cx="12191695" cy="45720"/>
           </a:xfrm>
           <a:prstGeom prst="rect">
             <a:avLst/>
           </a:prstGeom>
           <a:solidFill>
-            <a:srgbClr val="007BFF"/>
+            <a:srgbClr val="5046E5"/>
           </a:solidFill>
           <a:ln>
             <a:noFill/>
@@ -5683,14 +5539,57 @@
       </p:sp>
       <p:sp>
         <p:nvSpPr>
-          <p:cNvPr id="3" name="TextBox 2"/>
+          <p:cNvPr id="3" name="Rectangle 2"/>
+          <p:cNvSpPr/>
+          <p:nvPr/>
+        </p:nvSpPr>
+        <p:spPr>
+          <a:xfrm>
+            <a:off x="548640" y="411480"/>
+            <a:ext cx="36576" cy="502920"/>
+          </a:xfrm>
+          <a:prstGeom prst="rect">
+            <a:avLst/>
+          </a:prstGeom>
+          <a:solidFill>
+            <a:srgbClr val="5046E5"/>
+          </a:solidFill>
+          <a:ln>
+            <a:noFill/>
+          </a:ln>
+        </p:spPr>
+        <p:style>
+          <a:lnRef idx="1">
+            <a:schemeClr val="accent1"/>
+          </a:lnRef>
+          <a:fillRef idx="3">
+            <a:schemeClr val="accent1"/>
+          </a:fillRef>
+          <a:effectRef idx="2">
+            <a:schemeClr val="accent1"/>
+          </a:effectRef>
+          <a:fontRef idx="minor">
+            <a:schemeClr val="lt1"/>
+          </a:fontRef>
+        </p:style>
+        <p:txBody>
+          <a:bodyPr rtlCol="0" anchor="ctr"/>
+          <a:lstStyle/>
+          <a:p>
+            <a:pPr algn="ctr"/>
+          </a:p>
+        </p:txBody>
+      </p:sp>
+      <p:sp>
+        <p:nvSpPr>
+          <p:cNvPr id="4" name="TextBox 3"/>
           <p:cNvSpPr txBox="1"/>
           <p:nvPr/>
         </p:nvSpPr>
         <p:spPr>
           <a:xfrm>
-            <a:off x="731520" y="365760"/>
-            <a:ext cx="10515600" cy="822960"/>
+            <a:off x="777240" y="365760"/>
+            <a:ext cx="10058400" cy="640080"/>
           </a:xfrm>
           <a:prstGeom prst="rect">
             <a:avLst/>
@@ -5703,30 +5602,116 @@
           </a:bodyPr>
           <a:lstStyle/>
           <a:p>
-            <a:pPr>
-              <a:defRPr sz="3200" b="1">
-                <a:solidFill>
-                  <a:srgbClr val="222222"/>
-                </a:solidFill>
-                <a:latin typeface="Calibri"/>
-              </a:defRPr>
-            </a:pPr>
-            <a:r>
-              <a:t>Blocking</a:t>
-            </a:r>
-          </a:p>
-        </p:txBody>
-      </p:sp>
-      <p:sp>
-        <p:nvSpPr>
-          <p:cNvPr id="4" name="TextBox 3"/>
+            <a:pPr algn="l">
+              <a:defRPr sz="2800" b="1">
+                <a:solidFill>
+                  <a:srgbClr val="111111"/>
+                </a:solidFill>
+                <a:latin typeface="Inter"/>
+              </a:defRPr>
+            </a:pPr>
+            <a:r>
+              <a:t>Taguchi &amp; Mixture Designs</a:t>
+            </a:r>
+          </a:p>
+        </p:txBody>
+      </p:sp>
+      <p:sp>
+        <p:nvSpPr>
+          <p:cNvPr id="5" name="Rounded Rectangle 4"/>
+          <p:cNvSpPr/>
+          <p:nvPr/>
+        </p:nvSpPr>
+        <p:spPr>
+          <a:xfrm>
+            <a:off x="548640" y="1188720"/>
+            <a:ext cx="5303520" cy="4937760"/>
+          </a:xfrm>
+          <a:prstGeom prst="roundRect">
+            <a:avLst/>
+          </a:prstGeom>
+          <a:solidFill>
+            <a:srgbClr val="F0FDF4"/>
+          </a:solidFill>
+          <a:ln>
+            <a:noFill/>
+          </a:ln>
+        </p:spPr>
+        <p:style>
+          <a:lnRef idx="1">
+            <a:schemeClr val="accent1"/>
+          </a:lnRef>
+          <a:fillRef idx="3">
+            <a:schemeClr val="accent1"/>
+          </a:fillRef>
+          <a:effectRef idx="2">
+            <a:schemeClr val="accent1"/>
+          </a:effectRef>
+          <a:fontRef idx="minor">
+            <a:schemeClr val="lt1"/>
+          </a:fontRef>
+        </p:style>
+        <p:txBody>
+          <a:bodyPr rtlCol="0" anchor="ctr"/>
+          <a:lstStyle/>
+          <a:p>
+            <a:pPr algn="ctr"/>
+          </a:p>
+        </p:txBody>
+      </p:sp>
+      <p:sp>
+        <p:nvSpPr>
+          <p:cNvPr id="6" name="Rectangle 5"/>
+          <p:cNvSpPr/>
+          <p:nvPr/>
+        </p:nvSpPr>
+        <p:spPr>
+          <a:xfrm>
+            <a:off x="548640" y="1188720"/>
+            <a:ext cx="36576" cy="4937760"/>
+          </a:xfrm>
+          <a:prstGeom prst="rect">
+            <a:avLst/>
+          </a:prstGeom>
+          <a:solidFill>
+            <a:srgbClr val="16A34A"/>
+          </a:solidFill>
+          <a:ln>
+            <a:noFill/>
+          </a:ln>
+        </p:spPr>
+        <p:style>
+          <a:lnRef idx="1">
+            <a:schemeClr val="accent1"/>
+          </a:lnRef>
+          <a:fillRef idx="3">
+            <a:schemeClr val="accent1"/>
+          </a:fillRef>
+          <a:effectRef idx="2">
+            <a:schemeClr val="accent1"/>
+          </a:effectRef>
+          <a:fontRef idx="minor">
+            <a:schemeClr val="lt1"/>
+          </a:fontRef>
+        </p:style>
+        <p:txBody>
+          <a:bodyPr rtlCol="0" anchor="ctr"/>
+          <a:lstStyle/>
+          <a:p>
+            <a:pPr algn="ctr"/>
+          </a:p>
+        </p:txBody>
+      </p:sp>
+      <p:sp>
+        <p:nvSpPr>
+          <p:cNvPr id="7" name="TextBox 6"/>
           <p:cNvSpPr txBox="1"/>
           <p:nvPr/>
         </p:nvSpPr>
         <p:spPr>
           <a:xfrm>
-            <a:off x="914400" y="1463040"/>
-            <a:ext cx="10058400" cy="4754880"/>
+            <a:off x="822960" y="1325880"/>
+            <a:ext cx="4754880" cy="365760"/>
           </a:xfrm>
           <a:prstGeom prst="rect">
             <a:avLst/>
@@ -5739,115 +5724,412 @@
           </a:bodyPr>
           <a:lstStyle/>
           <a:p>
+            <a:pPr algn="l">
+              <a:defRPr sz="1600" b="1">
+                <a:solidFill>
+                  <a:srgbClr val="16A34A"/>
+                </a:solidFill>
+                <a:latin typeface="Consolas"/>
+              </a:defRPr>
+            </a:pPr>
+            <a:r>
+              <a:t>ROBUST DESIGN</a:t>
+            </a:r>
+          </a:p>
+        </p:txBody>
+      </p:sp>
+      <p:sp>
+        <p:nvSpPr>
+          <p:cNvPr id="8" name="TextBox 7"/>
+          <p:cNvSpPr txBox="1"/>
+          <p:nvPr/>
+        </p:nvSpPr>
+        <p:spPr>
+          <a:xfrm>
+            <a:off x="822960" y="1737360"/>
+            <a:ext cx="4754880" cy="4114800"/>
+          </a:xfrm>
+          <a:prstGeom prst="rect">
+            <a:avLst/>
+          </a:prstGeom>
+          <a:noFill/>
+        </p:spPr>
+        <p:txBody>
+          <a:bodyPr wrap="square">
+            <a:spAutoFit/>
+          </a:bodyPr>
+          <a:lstStyle/>
+          <a:p>
             <a:pPr>
               <a:spcAft>
-                <a:spcPts val="800"/>
+                <a:spcPts val="500"/>
               </a:spcAft>
-              <a:defRPr sz="2200" b="0">
-                <a:solidFill>
-                  <a:srgbClr val="222222"/>
-                </a:solidFill>
-                <a:latin typeface="Calibri"/>
-              </a:defRPr>
-            </a:pPr>
-            <a:r>
-              <a:t>Blocks account for known nuisance variables</a:t>
-            </a:r>
-          </a:p>
-          <a:p>
-            <a:pPr lvl="1">
-              <a:spcAft>
-                <a:spcPts val="800"/>
-              </a:spcAft>
-              <a:defRPr sz="1900">
-                <a:solidFill>
-                  <a:srgbClr val="222222"/>
-                </a:solidFill>
-                <a:latin typeface="Calibri"/>
-              </a:defRPr>
-            </a:pPr>
-            <a:r>
-              <a:t>Different batches of raw material</a:t>
-            </a:r>
-          </a:p>
-          <a:p>
-            <a:pPr lvl="1">
-              <a:spcAft>
-                <a:spcPts val="800"/>
-              </a:spcAft>
-              <a:defRPr sz="1900">
-                <a:solidFill>
-                  <a:srgbClr val="222222"/>
-                </a:solidFill>
-                <a:latin typeface="Calibri"/>
-              </a:defRPr>
-            </a:pPr>
-            <a:r>
-              <a:t>Different days or operators</a:t>
-            </a:r>
-          </a:p>
-          <a:p>
-            <a:pPr lvl="1">
-              <a:spcAft>
-                <a:spcPts val="800"/>
-              </a:spcAft>
-              <a:defRPr sz="1900">
-                <a:solidFill>
-                  <a:srgbClr val="222222"/>
-                </a:solidFill>
-                <a:latin typeface="Calibri"/>
-              </a:defRPr>
-            </a:pPr>
-            <a:r>
-              <a:t>Different machines</a:t>
+              <a:defRPr sz="1700">
+                <a:solidFill>
+                  <a:srgbClr val="333333"/>
+                </a:solidFill>
+                <a:latin typeface="Inter"/>
+              </a:defRPr>
+            </a:pPr>
+            <a:r>
+              <a:t>Taguchi Designs</a:t>
             </a:r>
           </a:p>
           <a:p>
             <a:pPr>
               <a:spcAft>
-                <a:spcPts val="800"/>
+                <a:spcPts val="500"/>
               </a:spcAft>
-              <a:defRPr sz="2200" b="0">
-                <a:solidFill>
-                  <a:srgbClr val="222222"/>
-                </a:solidFill>
-                <a:latin typeface="Calibri"/>
-              </a:defRPr>
-            </a:pPr>
-            <a:r>
-              <a:t>Block effects are estimated and removed from the analysis</a:t>
+              <a:defRPr sz="1700">
+                <a:solidFill>
+                  <a:srgbClr val="333333"/>
+                </a:solidFill>
+                <a:latin typeface="Inter"/>
+              </a:defRPr>
+            </a:pPr>
+            <a:r>
+              <a:t>Focus on robustness to noise</a:t>
             </a:r>
           </a:p>
           <a:p>
             <a:pPr>
               <a:spcAft>
-                <a:spcPts val="800"/>
+                <a:spcPts val="500"/>
               </a:spcAft>
-              <a:defRPr sz="2200" b="0">
-                <a:solidFill>
-                  <a:srgbClr val="222222"/>
-                </a:solidFill>
-                <a:latin typeface="Calibri"/>
-              </a:defRPr>
-            </a:pPr>
-            <a:r>
-              <a:t>doe-helper: set "blocks" in the design section</a:t>
+              <a:defRPr sz="1700">
+                <a:solidFill>
+                  <a:srgbClr val="333333"/>
+                </a:solidFill>
+                <a:latin typeface="Inter"/>
+              </a:defRPr>
+            </a:pPr>
+            <a:r>
+              <a:t>Inner array: controllable factors</a:t>
             </a:r>
           </a:p>
           <a:p>
             <a:pPr>
               <a:spcAft>
-                <a:spcPts val="800"/>
+                <a:spcPts val="500"/>
               </a:spcAft>
-              <a:defRPr sz="2200" b="0">
-                <a:solidFill>
-                  <a:srgbClr val="222222"/>
-                </a:solidFill>
-                <a:latin typeface="Calibri"/>
-              </a:defRPr>
-            </a:pPr>
-            <a:r>
-              <a:t>The design is constructed so blocks are orthogonal to treatments</a:t>
+              <a:defRPr sz="1700">
+                <a:solidFill>
+                  <a:srgbClr val="333333"/>
+                </a:solidFill>
+                <a:latin typeface="Inter"/>
+              </a:defRPr>
+            </a:pPr>
+            <a:r>
+              <a:t>Outer array: noise factors</a:t>
+            </a:r>
+          </a:p>
+          <a:p>
+            <a:pPr>
+              <a:spcAft>
+                <a:spcPts val="500"/>
+              </a:spcAft>
+              <a:defRPr sz="1700">
+                <a:solidFill>
+                  <a:srgbClr val="333333"/>
+                </a:solidFill>
+                <a:latin typeface="Inter"/>
+              </a:defRPr>
+            </a:pPr>
+            <a:r>
+              <a:t>S/N ratio as the response</a:t>
+            </a:r>
+          </a:p>
+          <a:p>
+            <a:pPr>
+              <a:spcAft>
+                <a:spcPts val="500"/>
+              </a:spcAft>
+              <a:defRPr sz="1700">
+                <a:solidFill>
+                  <a:srgbClr val="333333"/>
+                </a:solidFill>
+                <a:latin typeface="Inter"/>
+              </a:defRPr>
+            </a:pPr>
+            <a:r>
+              <a:t>doe-helper: "type": "taguchi"</a:t>
+            </a:r>
+          </a:p>
+        </p:txBody>
+      </p:sp>
+      <p:sp>
+        <p:nvSpPr>
+          <p:cNvPr id="9" name="Rounded Rectangle 8"/>
+          <p:cNvSpPr/>
+          <p:nvPr/>
+        </p:nvSpPr>
+        <p:spPr>
+          <a:xfrm>
+            <a:off x="6217920" y="1188720"/>
+            <a:ext cx="5303520" cy="4937760"/>
+          </a:xfrm>
+          <a:prstGeom prst="roundRect">
+            <a:avLst/>
+          </a:prstGeom>
+          <a:solidFill>
+            <a:srgbClr val="EEF2FF"/>
+          </a:solidFill>
+          <a:ln>
+            <a:noFill/>
+          </a:ln>
+        </p:spPr>
+        <p:style>
+          <a:lnRef idx="1">
+            <a:schemeClr val="accent1"/>
+          </a:lnRef>
+          <a:fillRef idx="3">
+            <a:schemeClr val="accent1"/>
+          </a:fillRef>
+          <a:effectRef idx="2">
+            <a:schemeClr val="accent1"/>
+          </a:effectRef>
+          <a:fontRef idx="minor">
+            <a:schemeClr val="lt1"/>
+          </a:fontRef>
+        </p:style>
+        <p:txBody>
+          <a:bodyPr rtlCol="0" anchor="ctr"/>
+          <a:lstStyle/>
+          <a:p>
+            <a:pPr algn="ctr"/>
+          </a:p>
+        </p:txBody>
+      </p:sp>
+      <p:sp>
+        <p:nvSpPr>
+          <p:cNvPr id="10" name="Rectangle 9"/>
+          <p:cNvSpPr/>
+          <p:nvPr/>
+        </p:nvSpPr>
+        <p:spPr>
+          <a:xfrm>
+            <a:off x="6217920" y="1188720"/>
+            <a:ext cx="36576" cy="4937760"/>
+          </a:xfrm>
+          <a:prstGeom prst="rect">
+            <a:avLst/>
+          </a:prstGeom>
+          <a:solidFill>
+            <a:srgbClr val="5046E5"/>
+          </a:solidFill>
+          <a:ln>
+            <a:noFill/>
+          </a:ln>
+        </p:spPr>
+        <p:style>
+          <a:lnRef idx="1">
+            <a:schemeClr val="accent1"/>
+          </a:lnRef>
+          <a:fillRef idx="3">
+            <a:schemeClr val="accent1"/>
+          </a:fillRef>
+          <a:effectRef idx="2">
+            <a:schemeClr val="accent1"/>
+          </a:effectRef>
+          <a:fontRef idx="minor">
+            <a:schemeClr val="lt1"/>
+          </a:fontRef>
+        </p:style>
+        <p:txBody>
+          <a:bodyPr rtlCol="0" anchor="ctr"/>
+          <a:lstStyle/>
+          <a:p>
+            <a:pPr algn="ctr"/>
+          </a:p>
+        </p:txBody>
+      </p:sp>
+      <p:sp>
+        <p:nvSpPr>
+          <p:cNvPr id="11" name="TextBox 10"/>
+          <p:cNvSpPr txBox="1"/>
+          <p:nvPr/>
+        </p:nvSpPr>
+        <p:spPr>
+          <a:xfrm>
+            <a:off x="6492240" y="1325880"/>
+            <a:ext cx="4754880" cy="365760"/>
+          </a:xfrm>
+          <a:prstGeom prst="rect">
+            <a:avLst/>
+          </a:prstGeom>
+          <a:noFill/>
+        </p:spPr>
+        <p:txBody>
+          <a:bodyPr wrap="square">
+            <a:spAutoFit/>
+          </a:bodyPr>
+          <a:lstStyle/>
+          <a:p>
+            <a:pPr algn="l">
+              <a:defRPr sz="1600" b="1">
+                <a:solidFill>
+                  <a:srgbClr val="5046E5"/>
+                </a:solidFill>
+                <a:latin typeface="Consolas"/>
+              </a:defRPr>
+            </a:pPr>
+            <a:r>
+              <a:t>MIXTURES</a:t>
+            </a:r>
+          </a:p>
+        </p:txBody>
+      </p:sp>
+      <p:sp>
+        <p:nvSpPr>
+          <p:cNvPr id="12" name="TextBox 11"/>
+          <p:cNvSpPr txBox="1"/>
+          <p:nvPr/>
+        </p:nvSpPr>
+        <p:spPr>
+          <a:xfrm>
+            <a:off x="6492240" y="1737360"/>
+            <a:ext cx="4754880" cy="4114800"/>
+          </a:xfrm>
+          <a:prstGeom prst="rect">
+            <a:avLst/>
+          </a:prstGeom>
+          <a:noFill/>
+        </p:spPr>
+        <p:txBody>
+          <a:bodyPr wrap="square">
+            <a:spAutoFit/>
+          </a:bodyPr>
+          <a:lstStyle/>
+          <a:p>
+            <a:pPr>
+              <a:spcAft>
+                <a:spcPts val="500"/>
+              </a:spcAft>
+              <a:defRPr sz="1700">
+                <a:solidFill>
+                  <a:srgbClr val="333333"/>
+                </a:solidFill>
+                <a:latin typeface="Inter"/>
+              </a:defRPr>
+            </a:pPr>
+            <a:r>
+              <a:t>Mixture Experiments</a:t>
+            </a:r>
+          </a:p>
+          <a:p>
+            <a:pPr>
+              <a:spcAft>
+                <a:spcPts val="500"/>
+              </a:spcAft>
+              <a:defRPr sz="1700">
+                <a:solidFill>
+                  <a:srgbClr val="333333"/>
+                </a:solidFill>
+                <a:latin typeface="Inter"/>
+              </a:defRPr>
+            </a:pPr>
+            <a:r>
+              <a:t>Proportions must sum to 1</a:t>
+            </a:r>
+          </a:p>
+          <a:p>
+            <a:pPr>
+              <a:spcAft>
+                <a:spcPts val="500"/>
+              </a:spcAft>
+              <a:defRPr sz="1700">
+                <a:solidFill>
+                  <a:srgbClr val="333333"/>
+                </a:solidFill>
+                <a:latin typeface="Inter"/>
+              </a:defRPr>
+            </a:pPr>
+            <a:r>
+              <a:t>E.g. concrete, alloys, formulations</a:t>
+            </a:r>
+          </a:p>
+          <a:p>
+            <a:pPr>
+              <a:spcAft>
+                <a:spcPts val="500"/>
+              </a:spcAft>
+              <a:defRPr sz="1700">
+                <a:solidFill>
+                  <a:srgbClr val="333333"/>
+                </a:solidFill>
+                <a:latin typeface="Inter"/>
+              </a:defRPr>
+            </a:pPr>
+            <a:r>
+              <a:t>Simplex-Lattice: evenly spaced</a:t>
+            </a:r>
+          </a:p>
+          <a:p>
+            <a:pPr>
+              <a:spcAft>
+                <a:spcPts val="500"/>
+              </a:spcAft>
+              <a:defRPr sz="1700">
+                <a:solidFill>
+                  <a:srgbClr val="333333"/>
+                </a:solidFill>
+                <a:latin typeface="Inter"/>
+              </a:defRPr>
+            </a:pPr>
+            <a:r>
+              <a:t>Simplex-Centroid: vertices + center</a:t>
+            </a:r>
+          </a:p>
+          <a:p>
+            <a:pPr>
+              <a:spcAft>
+                <a:spcPts val="500"/>
+              </a:spcAft>
+              <a:defRPr sz="1700">
+                <a:solidFill>
+                  <a:srgbClr val="333333"/>
+                </a:solidFill>
+                <a:latin typeface="Inter"/>
+              </a:defRPr>
+            </a:pPr>
+            <a:r>
+              <a:t>doe-helper: "type": "simplex_lattice"</a:t>
+            </a:r>
+          </a:p>
+        </p:txBody>
+      </p:sp>
+      <p:sp>
+        <p:nvSpPr>
+          <p:cNvPr id="13" name="TextBox 12"/>
+          <p:cNvSpPr txBox="1"/>
+          <p:nvPr/>
+        </p:nvSpPr>
+        <p:spPr>
+          <a:xfrm>
+            <a:off x="731520" y="6400800"/>
+            <a:ext cx="10058400" cy="365760"/>
+          </a:xfrm>
+          <a:prstGeom prst="rect">
+            <a:avLst/>
+          </a:prstGeom>
+          <a:noFill/>
+        </p:spPr>
+        <p:txBody>
+          <a:bodyPr wrap="square">
+            <a:spAutoFit/>
+          </a:bodyPr>
+          <a:lstStyle/>
+          <a:p>
+            <a:pPr algn="l">
+              <a:defRPr sz="1000" b="0">
+                <a:solidFill>
+                  <a:srgbClr val="999999"/>
+                </a:solidFill>
+                <a:latin typeface="Consolas"/>
+              </a:defRPr>
+            </a:pPr>
+            <a:r>
+              <a:t>© 2026 Martin J. Gallagher  |  GPL-3.0-or-later  |  doehelper.com</a:t>
             </a:r>
           </a:p>
         </p:txBody>
@@ -5866,7 +6148,7 @@
     <p:bg>
       <p:bgPr>
         <a:solidFill>
-          <a:srgbClr val="FFFFFF"/>
+          <a:srgbClr val="FAFAFA"/>
         </a:solidFill>
         <a:effectLst/>
       </p:bgPr>
@@ -5887,13 +6169,13 @@
         <p:spPr>
           <a:xfrm>
             <a:off x="0" y="0"/>
-            <a:ext cx="12191695" cy="54864"/>
+            <a:ext cx="12191695" cy="45720"/>
           </a:xfrm>
           <a:prstGeom prst="rect">
             <a:avLst/>
           </a:prstGeom>
           <a:solidFill>
-            <a:srgbClr val="007BFF"/>
+            <a:srgbClr val="5046E5"/>
           </a:solidFill>
           <a:ln>
             <a:noFill/>
@@ -5923,14 +6205,57 @@
       </p:sp>
       <p:sp>
         <p:nvSpPr>
-          <p:cNvPr id="3" name="TextBox 2"/>
+          <p:cNvPr id="3" name="Rectangle 2"/>
+          <p:cNvSpPr/>
+          <p:nvPr/>
+        </p:nvSpPr>
+        <p:spPr>
+          <a:xfrm>
+            <a:off x="548640" y="411480"/>
+            <a:ext cx="36576" cy="502920"/>
+          </a:xfrm>
+          <a:prstGeom prst="rect">
+            <a:avLst/>
+          </a:prstGeom>
+          <a:solidFill>
+            <a:srgbClr val="5046E5"/>
+          </a:solidFill>
+          <a:ln>
+            <a:noFill/>
+          </a:ln>
+        </p:spPr>
+        <p:style>
+          <a:lnRef idx="1">
+            <a:schemeClr val="accent1"/>
+          </a:lnRef>
+          <a:fillRef idx="3">
+            <a:schemeClr val="accent1"/>
+          </a:fillRef>
+          <a:effectRef idx="2">
+            <a:schemeClr val="accent1"/>
+          </a:effectRef>
+          <a:fontRef idx="minor">
+            <a:schemeClr val="lt1"/>
+          </a:fontRef>
+        </p:style>
+        <p:txBody>
+          <a:bodyPr rtlCol="0" anchor="ctr"/>
+          <a:lstStyle/>
+          <a:p>
+            <a:pPr algn="ctr"/>
+          </a:p>
+        </p:txBody>
+      </p:sp>
+      <p:sp>
+        <p:nvSpPr>
+          <p:cNvPr id="4" name="TextBox 3"/>
           <p:cNvSpPr txBox="1"/>
           <p:nvPr/>
         </p:nvSpPr>
         <p:spPr>
           <a:xfrm>
-            <a:off x="731520" y="365760"/>
-            <a:ext cx="10515600" cy="822960"/>
+            <a:off x="777240" y="365760"/>
+            <a:ext cx="10058400" cy="640080"/>
           </a:xfrm>
           <a:prstGeom prst="rect">
             <a:avLst/>
@@ -5943,30 +6268,30 @@
           </a:bodyPr>
           <a:lstStyle/>
           <a:p>
-            <a:pPr>
-              <a:defRPr sz="3200" b="1">
-                <a:solidFill>
-                  <a:srgbClr val="222222"/>
-                </a:solidFill>
-                <a:latin typeface="Calibri"/>
-              </a:defRPr>
-            </a:pPr>
-            <a:r>
-              <a:t>Taguchi Designs</a:t>
-            </a:r>
-          </a:p>
-        </p:txBody>
-      </p:sp>
-      <p:sp>
-        <p:nvSpPr>
-          <p:cNvPr id="4" name="TextBox 3"/>
+            <a:pPr algn="l">
+              <a:defRPr sz="2800" b="1">
+                <a:solidFill>
+                  <a:srgbClr val="111111"/>
+                </a:solidFill>
+                <a:latin typeface="Inter"/>
+              </a:defRPr>
+            </a:pPr>
+            <a:r>
+              <a:t>Blocking &amp; D-Optimal Designs</a:t>
+            </a:r>
+          </a:p>
+        </p:txBody>
+      </p:sp>
+      <p:sp>
+        <p:nvSpPr>
+          <p:cNvPr id="5" name="TextBox 4"/>
           <p:cNvSpPr txBox="1"/>
           <p:nvPr/>
         </p:nvSpPr>
         <p:spPr>
           <a:xfrm>
-            <a:off x="914400" y="1463040"/>
-            <a:ext cx="10058400" cy="4754880"/>
+            <a:off x="822960" y="1188720"/>
+            <a:ext cx="10241280" cy="5120640"/>
           </a:xfrm>
           <a:prstGeom prst="rect">
             <a:avLst/>
@@ -5981,97 +6306,178 @@
           <a:p>
             <a:pPr>
               <a:spcAft>
-                <a:spcPts val="800"/>
+                <a:spcPts val="600"/>
               </a:spcAft>
-              <a:defRPr sz="2200" b="0">
-                <a:solidFill>
-                  <a:srgbClr val="222222"/>
-                </a:solidFill>
-                <a:latin typeface="Calibri"/>
-              </a:defRPr>
-            </a:pPr>
-            <a:r>
-              <a:t>Focus on robustness: find settings insensitive to noise</a:t>
+              <a:defRPr sz="1900">
+                <a:solidFill>
+                  <a:srgbClr val="333333"/>
+                </a:solidFill>
+                <a:latin typeface="Inter"/>
+              </a:defRPr>
+            </a:pPr>
+            <a:r>
+              <a:t>Blocking accounts for known nuisance variables</a:t>
+            </a:r>
+          </a:p>
+          <a:p>
+            <a:pPr lvl="1">
+              <a:spcAft>
+                <a:spcPts val="600"/>
+              </a:spcAft>
+              <a:defRPr sz="1700">
+                <a:solidFill>
+                  <a:srgbClr val="666666"/>
+                </a:solidFill>
+                <a:latin typeface="Inter"/>
+              </a:defRPr>
+            </a:pPr>
+            <a:r>
+              <a:t>Different batches, days, operators, machines</a:t>
+            </a:r>
+          </a:p>
+          <a:p>
+            <a:pPr lvl="1">
+              <a:spcAft>
+                <a:spcPts val="600"/>
+              </a:spcAft>
+              <a:defRPr sz="1700">
+                <a:solidFill>
+                  <a:srgbClr val="666666"/>
+                </a:solidFill>
+                <a:latin typeface="Inter"/>
+              </a:defRPr>
+            </a:pPr>
+            <a:r>
+              <a:t>Block effects are estimated and removed from analysis</a:t>
+            </a:r>
+          </a:p>
+          <a:p>
+            <a:pPr lvl="1">
+              <a:spcAft>
+                <a:spcPts val="600"/>
+              </a:spcAft>
+              <a:defRPr sz="1700">
+                <a:solidFill>
+                  <a:srgbClr val="666666"/>
+                </a:solidFill>
+                <a:latin typeface="Inter"/>
+              </a:defRPr>
+            </a:pPr>
+            <a:r>
+              <a:t>doe-helper: set "blocks" in the design section</a:t>
             </a:r>
           </a:p>
           <a:p>
             <a:pPr>
               <a:spcAft>
-                <a:spcPts val="800"/>
+                <a:spcPts val="600"/>
               </a:spcAft>
-              <a:defRPr sz="2200" b="0">
-                <a:solidFill>
-                  <a:srgbClr val="222222"/>
-                </a:solidFill>
-                <a:latin typeface="Calibri"/>
-              </a:defRPr>
-            </a:pPr>
-            <a:r>
-              <a:t>Inner array: controllable factors</a:t>
-            </a:r>
+              <a:defRPr sz="1900">
+                <a:solidFill>
+                  <a:srgbClr val="333333"/>
+                </a:solidFill>
+                <a:latin typeface="Inter"/>
+              </a:defRPr>
+            </a:pPr>
           </a:p>
           <a:p>
             <a:pPr>
               <a:spcAft>
-                <a:spcPts val="800"/>
+                <a:spcPts val="600"/>
               </a:spcAft>
-              <a:defRPr sz="2200" b="0">
-                <a:solidFill>
-                  <a:srgbClr val="222222"/>
-                </a:solidFill>
-                <a:latin typeface="Calibri"/>
-              </a:defRPr>
-            </a:pPr>
-            <a:r>
-              <a:t>Outer array: noise factors (things you can't control)</a:t>
-            </a:r>
-          </a:p>
-          <a:p>
-            <a:pPr>
+              <a:defRPr sz="1900">
+                <a:solidFill>
+                  <a:srgbClr val="333333"/>
+                </a:solidFill>
+                <a:latin typeface="Inter"/>
+              </a:defRPr>
+            </a:pPr>
+            <a:r>
+              <a:t>D-Optimal: computer-generated for non-standard situations</a:t>
+            </a:r>
+          </a:p>
+          <a:p>
+            <a:pPr lvl="1">
               <a:spcAft>
-                <a:spcPts val="800"/>
+                <a:spcPts val="600"/>
               </a:spcAft>
-              <a:defRPr sz="2200" b="0">
-                <a:solidFill>
-                  <a:srgbClr val="222222"/>
-                </a:solidFill>
-                <a:latin typeface="Calibri"/>
-              </a:defRPr>
-            </a:pPr>
-            <a:r>
-              <a:t>Signal-to-noise (S/N) ratio as the response</a:t>
-            </a:r>
-          </a:p>
-          <a:p>
-            <a:pPr>
+              <a:defRPr sz="1700">
+                <a:solidFill>
+                  <a:srgbClr val="666666"/>
+                </a:solidFill>
+                <a:latin typeface="Inter"/>
+              </a:defRPr>
+            </a:pPr>
+            <a:r>
+              <a:t>Irregular factor space, constraints</a:t>
+            </a:r>
+          </a:p>
+          <a:p>
+            <a:pPr lvl="1">
               <a:spcAft>
-                <a:spcPts val="800"/>
+                <a:spcPts val="600"/>
               </a:spcAft>
-              <a:defRPr sz="2200" b="0">
-                <a:solidFill>
-                  <a:srgbClr val="222222"/>
-                </a:solidFill>
-                <a:latin typeface="Calibri"/>
-              </a:defRPr>
-            </a:pPr>
-            <a:r>
-              <a:t>doe-helper: set "type": "taguchi"</a:t>
-            </a:r>
-          </a:p>
-          <a:p>
-            <a:pPr>
+              <a:defRPr sz="1700">
+                <a:solidFill>
+                  <a:srgbClr val="666666"/>
+                </a:solidFill>
+                <a:latin typeface="Inter"/>
+              </a:defRPr>
+            </a:pPr>
+            <a:r>
+              <a:t>Mix of continuous and categorical factors</a:t>
+            </a:r>
+          </a:p>
+          <a:p>
+            <a:pPr lvl="1">
               <a:spcAft>
-                <a:spcPts val="800"/>
+                <a:spcPts val="600"/>
               </a:spcAft>
-              <a:defRPr sz="2200" b="0">
-                <a:solidFill>
-                  <a:srgbClr val="222222"/>
-                </a:solidFill>
-                <a:latin typeface="Calibri"/>
-              </a:defRPr>
-            </a:pPr>
-            <a:r>
-              <a:t>Useful for manufacturing where environmental variation matters</a:t>
+              <a:defRPr sz="1700">
+                <a:solidFill>
+                  <a:srgbClr val="666666"/>
+                </a:solidFill>
+                <a:latin typeface="Inter"/>
+              </a:defRPr>
+            </a:pPr>
+            <a:r>
+              <a:t>doe-helper: "type": "d_optimal", "runs": N</a:t>
+            </a:r>
+          </a:p>
+        </p:txBody>
+      </p:sp>
+      <p:sp>
+        <p:nvSpPr>
+          <p:cNvPr id="6" name="TextBox 5"/>
+          <p:cNvSpPr txBox="1"/>
+          <p:nvPr/>
+        </p:nvSpPr>
+        <p:spPr>
+          <a:xfrm>
+            <a:off x="731520" y="6400800"/>
+            <a:ext cx="10058400" cy="365760"/>
+          </a:xfrm>
+          <a:prstGeom prst="rect">
+            <a:avLst/>
+          </a:prstGeom>
+          <a:noFill/>
+        </p:spPr>
+        <p:txBody>
+          <a:bodyPr wrap="square">
+            <a:spAutoFit/>
+          </a:bodyPr>
+          <a:lstStyle/>
+          <a:p>
+            <a:pPr algn="l">
+              <a:defRPr sz="1000" b="0">
+                <a:solidFill>
+                  <a:srgbClr val="999999"/>
+                </a:solidFill>
+                <a:latin typeface="Consolas"/>
+              </a:defRPr>
+            </a:pPr>
+            <a:r>
+              <a:t>© 2026 Martin J. Gallagher  |  GPL-3.0-or-later  |  doehelper.com</a:t>
             </a:r>
           </a:p>
         </p:txBody>
@@ -6090,7 +6496,7 @@
     <p:bg>
       <p:bgPr>
         <a:solidFill>
-          <a:srgbClr val="FFFFFF"/>
+          <a:srgbClr val="FAFAFA"/>
         </a:solidFill>
         <a:effectLst/>
       </p:bgPr>
@@ -6111,13 +6517,13 @@
         <p:spPr>
           <a:xfrm>
             <a:off x="0" y="0"/>
-            <a:ext cx="12191695" cy="54864"/>
+            <a:ext cx="12191695" cy="45720"/>
           </a:xfrm>
           <a:prstGeom prst="rect">
             <a:avLst/>
           </a:prstGeom>
           <a:solidFill>
-            <a:srgbClr val="007BFF"/>
+            <a:srgbClr val="0D9488"/>
           </a:solidFill>
           <a:ln>
             <a:noFill/>
@@ -6153,8 +6559,8 @@
         </p:nvSpPr>
         <p:spPr>
           <a:xfrm>
-            <a:off x="731520" y="365760"/>
-            <a:ext cx="10515600" cy="822960"/>
+            <a:off x="777240" y="320040"/>
+            <a:ext cx="10058400" cy="548640"/>
           </a:xfrm>
           <a:prstGeom prst="rect">
             <a:avLst/>
@@ -6167,30 +6573,364 @@
           </a:bodyPr>
           <a:lstStyle/>
           <a:p>
-            <a:pPr>
-              <a:defRPr sz="3200" b="1">
-                <a:solidFill>
-                  <a:srgbClr val="222222"/>
-                </a:solidFill>
-                <a:latin typeface="Calibri"/>
-              </a:defRPr>
-            </a:pPr>
-            <a:r>
-              <a:t>Mixture Experiments</a:t>
-            </a:r>
-          </a:p>
-        </p:txBody>
-      </p:sp>
-      <p:sp>
-        <p:nvSpPr>
-          <p:cNvPr id="4" name="TextBox 3"/>
+            <a:pPr algn="l">
+              <a:defRPr sz="2600" b="1">
+                <a:solidFill>
+                  <a:srgbClr val="111111"/>
+                </a:solidFill>
+                <a:latin typeface="Inter"/>
+              </a:defRPr>
+            </a:pPr>
+            <a:r>
+              <a:t>Power Analysis with doe-helper</a:t>
+            </a:r>
+          </a:p>
+        </p:txBody>
+      </p:sp>
+      <p:sp>
+        <p:nvSpPr>
+          <p:cNvPr id="4" name="Rectangle 3"/>
+          <p:cNvSpPr/>
+          <p:nvPr/>
+        </p:nvSpPr>
+        <p:spPr>
+          <a:xfrm>
+            <a:off x="548640" y="1051560"/>
+            <a:ext cx="10972800" cy="320040"/>
+          </a:xfrm>
+          <a:prstGeom prst="rect">
+            <a:avLst/>
+          </a:prstGeom>
+          <a:solidFill>
+            <a:srgbClr val="222222"/>
+          </a:solidFill>
+          <a:ln>
+            <a:noFill/>
+          </a:ln>
+        </p:spPr>
+        <p:style>
+          <a:lnRef idx="1">
+            <a:schemeClr val="accent1"/>
+          </a:lnRef>
+          <a:fillRef idx="3">
+            <a:schemeClr val="accent1"/>
+          </a:fillRef>
+          <a:effectRef idx="2">
+            <a:schemeClr val="accent1"/>
+          </a:effectRef>
+          <a:fontRef idx="minor">
+            <a:schemeClr val="lt1"/>
+          </a:fontRef>
+        </p:style>
+        <p:txBody>
+          <a:bodyPr rtlCol="0" anchor="ctr"/>
+          <a:lstStyle/>
+          <a:p>
+            <a:pPr algn="ctr"/>
+          </a:p>
+        </p:txBody>
+      </p:sp>
+      <p:sp>
+        <p:nvSpPr>
+          <p:cNvPr id="5" name="TextBox 4"/>
           <p:cNvSpPr txBox="1"/>
           <p:nvPr/>
         </p:nvSpPr>
         <p:spPr>
           <a:xfrm>
-            <a:off x="914400" y="1463040"/>
-            <a:ext cx="10058400" cy="4754880"/>
+            <a:off x="822960" y="1051560"/>
+            <a:ext cx="3657600" cy="320040"/>
+          </a:xfrm>
+          <a:prstGeom prst="rect">
+            <a:avLst/>
+          </a:prstGeom>
+          <a:noFill/>
+        </p:spPr>
+        <p:txBody>
+          <a:bodyPr wrap="square" anchor="ctr">
+            <a:spAutoFit/>
+          </a:bodyPr>
+          <a:lstStyle/>
+          <a:p>
+            <a:pPr algn="l">
+              <a:defRPr sz="1000" b="0">
+                <a:solidFill>
+                  <a:srgbClr val="999999"/>
+                </a:solidFill>
+                <a:latin typeface="Consolas"/>
+              </a:defRPr>
+            </a:pPr>
+            <a:r>
+              <a:t>terminal</a:t>
+            </a:r>
+          </a:p>
+        </p:txBody>
+      </p:sp>
+      <p:sp>
+        <p:nvSpPr>
+          <p:cNvPr id="6" name="Rounded Rectangle 5"/>
+          <p:cNvSpPr/>
+          <p:nvPr/>
+        </p:nvSpPr>
+        <p:spPr>
+          <a:xfrm>
+            <a:off x="548640" y="1371600"/>
+            <a:ext cx="10972800" cy="3931920"/>
+          </a:xfrm>
+          <a:prstGeom prst="roundRect">
+            <a:avLst/>
+          </a:prstGeom>
+          <a:solidFill>
+            <a:srgbClr val="1A1A1A"/>
+          </a:solidFill>
+          <a:ln>
+            <a:noFill/>
+          </a:ln>
+        </p:spPr>
+        <p:style>
+          <a:lnRef idx="1">
+            <a:schemeClr val="accent1"/>
+          </a:lnRef>
+          <a:fillRef idx="3">
+            <a:schemeClr val="accent1"/>
+          </a:fillRef>
+          <a:effectRef idx="2">
+            <a:schemeClr val="accent1"/>
+          </a:effectRef>
+          <a:fontRef idx="minor">
+            <a:schemeClr val="lt1"/>
+          </a:fontRef>
+        </p:style>
+        <p:txBody>
+          <a:bodyPr rtlCol="0" anchor="ctr" wrap="square" lIns="274320" tIns="182880" rIns="274320"/>
+          <a:lstStyle/>
+          <a:p>
+            <a:pPr algn="ctr">
+              <a:spcAft>
+                <a:spcPts val="100"/>
+              </a:spcAft>
+              <a:defRPr sz="1500">
+                <a:solidFill>
+                  <a:srgbClr val="6EC86E"/>
+                </a:solidFill>
+                <a:latin typeface="Consolas"/>
+              </a:defRPr>
+            </a:pPr>
+            <a:r>
+              <a:t>$ doe power experiment/</a:t>
+            </a:r>
+          </a:p>
+          <a:p>
+            <a:pPr>
+              <a:spcAft>
+                <a:spcPts val="100"/>
+              </a:spcAft>
+              <a:defRPr sz="1500">
+                <a:solidFill>
+                  <a:srgbClr val="CCCCCC"/>
+                </a:solidFill>
+                <a:latin typeface="Consolas"/>
+              </a:defRPr>
+            </a:pPr>
+          </a:p>
+          <a:p>
+            <a:pPr>
+              <a:spcAft>
+                <a:spcPts val="100"/>
+              </a:spcAft>
+              <a:defRPr sz="1500">
+                <a:solidFill>
+                  <a:srgbClr val="CCCCCC"/>
+                </a:solidFill>
+                <a:latin typeface="Consolas"/>
+              </a:defRPr>
+            </a:pPr>
+            <a:r>
+              <a:t>Power Analysis</a:t>
+            </a:r>
+          </a:p>
+          <a:p>
+            <a:pPr>
+              <a:spcAft>
+                <a:spcPts val="100"/>
+              </a:spcAft>
+              <a:defRPr sz="1500">
+                <a:solidFill>
+                  <a:srgbClr val="CCCCCC"/>
+                </a:solidFill>
+                <a:latin typeface="Consolas"/>
+              </a:defRPr>
+            </a:pPr>
+            <a:r>
+              <a:t>  Design:       full_factorial (2^3)</a:t>
+            </a:r>
+          </a:p>
+          <a:p>
+            <a:pPr>
+              <a:spcAft>
+                <a:spcPts val="100"/>
+              </a:spcAft>
+              <a:defRPr sz="1500">
+                <a:solidFill>
+                  <a:srgbClr val="CCCCCC"/>
+                </a:solidFill>
+                <a:latin typeface="Consolas"/>
+              </a:defRPr>
+            </a:pPr>
+            <a:r>
+              <a:t>  Runs:         8</a:t>
+            </a:r>
+          </a:p>
+          <a:p>
+            <a:pPr>
+              <a:spcAft>
+                <a:spcPts val="100"/>
+              </a:spcAft>
+              <a:defRPr sz="1500">
+                <a:solidFill>
+                  <a:srgbClr val="CCCCCC"/>
+                </a:solidFill>
+                <a:latin typeface="Consolas"/>
+              </a:defRPr>
+            </a:pPr>
+            <a:r>
+              <a:t>  Error est.:   2.5 (from prior data or estimate)</a:t>
+            </a:r>
+          </a:p>
+          <a:p>
+            <a:pPr>
+              <a:spcAft>
+                <a:spcPts val="100"/>
+              </a:spcAft>
+              <a:defRPr sz="1500">
+                <a:solidFill>
+                  <a:srgbClr val="CCCCCC"/>
+                </a:solidFill>
+                <a:latin typeface="Consolas"/>
+              </a:defRPr>
+            </a:pPr>
+          </a:p>
+          <a:p>
+            <a:pPr>
+              <a:spcAft>
+                <a:spcPts val="100"/>
+              </a:spcAft>
+              <a:defRPr sz="1500">
+                <a:solidFill>
+                  <a:srgbClr val="CCCCCC"/>
+                </a:solidFill>
+                <a:latin typeface="Consolas"/>
+              </a:defRPr>
+            </a:pPr>
+            <a:r>
+              <a:t>  Detectable Effect Sizes (80% power, alpha=0.05):</a:t>
+            </a:r>
+          </a:p>
+          <a:p>
+            <a:pPr>
+              <a:spcAft>
+                <a:spcPts val="100"/>
+              </a:spcAft>
+              <a:defRPr sz="1500">
+                <a:solidFill>
+                  <a:srgbClr val="CCCCCC"/>
+                </a:solidFill>
+                <a:latin typeface="Consolas"/>
+              </a:defRPr>
+            </a:pPr>
+            <a:r>
+              <a:t>    Main effects:    3.2 units</a:t>
+            </a:r>
+          </a:p>
+          <a:p>
+            <a:pPr>
+              <a:spcAft>
+                <a:spcPts val="100"/>
+              </a:spcAft>
+              <a:defRPr sz="1500">
+                <a:solidFill>
+                  <a:srgbClr val="CCCCCC"/>
+                </a:solidFill>
+                <a:latin typeface="Consolas"/>
+              </a:defRPr>
+            </a:pPr>
+            <a:r>
+              <a:t>    2-factor int.:   3.2 units</a:t>
+            </a:r>
+          </a:p>
+          <a:p>
+            <a:pPr>
+              <a:spcAft>
+                <a:spcPts val="100"/>
+              </a:spcAft>
+              <a:defRPr sz="1500">
+                <a:solidFill>
+                  <a:srgbClr val="CCCCCC"/>
+                </a:solidFill>
+                <a:latin typeface="Consolas"/>
+              </a:defRPr>
+            </a:pPr>
+          </a:p>
+          <a:p>
+            <a:pPr>
+              <a:spcAft>
+                <a:spcPts val="100"/>
+              </a:spcAft>
+              <a:defRPr sz="1500">
+                <a:solidFill>
+                  <a:srgbClr val="6EC86E"/>
+                </a:solidFill>
+                <a:latin typeface="Consolas"/>
+              </a:defRPr>
+            </a:pPr>
+            <a:r>
+              <a:t>$ doe power experiment/ --effect-size 5.0</a:t>
+            </a:r>
+          </a:p>
+          <a:p>
+            <a:pPr>
+              <a:spcAft>
+                <a:spcPts val="100"/>
+              </a:spcAft>
+              <a:defRPr sz="1500">
+                <a:solidFill>
+                  <a:srgbClr val="CCCCCC"/>
+                </a:solidFill>
+                <a:latin typeface="Consolas"/>
+              </a:defRPr>
+            </a:pPr>
+            <a:r>
+              <a:t>  Power: 0.95 for main effects</a:t>
+            </a:r>
+          </a:p>
+          <a:p>
+            <a:pPr>
+              <a:spcAft>
+                <a:spcPts val="100"/>
+              </a:spcAft>
+              <a:defRPr sz="1500">
+                <a:solidFill>
+                  <a:srgbClr val="CCCCCC"/>
+                </a:solidFill>
+                <a:latin typeface="Consolas"/>
+              </a:defRPr>
+            </a:pPr>
+            <a:r>
+              <a:t>  Power: 0.95 for 2-factor interactions</a:t>
+            </a:r>
+          </a:p>
+        </p:txBody>
+      </p:sp>
+      <p:sp>
+        <p:nvSpPr>
+          <p:cNvPr id="7" name="TextBox 6"/>
+          <p:cNvSpPr txBox="1"/>
+          <p:nvPr/>
+        </p:nvSpPr>
+        <p:spPr>
+          <a:xfrm>
+            <a:off x="822960" y="5349240"/>
+            <a:ext cx="10058400" cy="640080"/>
           </a:xfrm>
           <a:prstGeom prst="rect">
             <a:avLst/>
@@ -6203,131 +6943,52 @@
           </a:bodyPr>
           <a:lstStyle/>
           <a:p>
-            <a:pPr>
-              <a:spcAft>
-                <a:spcPts val="800"/>
-              </a:spcAft>
-              <a:defRPr sz="2200" b="0">
-                <a:solidFill>
-                  <a:srgbClr val="222222"/>
-                </a:solidFill>
-                <a:latin typeface="Calibri"/>
-              </a:defRPr>
-            </a:pPr>
-            <a:r>
-              <a:t>When factors are proportions that must sum to 1 (or 100%)</a:t>
-            </a:r>
-          </a:p>
-          <a:p>
-            <a:pPr lvl="1">
-              <a:spcAft>
-                <a:spcPts val="800"/>
-              </a:spcAft>
-              <a:defRPr sz="1900">
-                <a:solidFill>
-                  <a:srgbClr val="222222"/>
-                </a:solidFill>
-                <a:latin typeface="Calibri"/>
-              </a:defRPr>
-            </a:pPr>
-            <a:r>
-              <a:t>Concrete: cement, water, aggregate, admixture</a:t>
-            </a:r>
-          </a:p>
-          <a:p>
-            <a:pPr lvl="1">
-              <a:spcAft>
-                <a:spcPts val="800"/>
-              </a:spcAft>
-              <a:defRPr sz="1900">
-                <a:solidFill>
-                  <a:srgbClr val="222222"/>
-                </a:solidFill>
-                <a:latin typeface="Calibri"/>
-              </a:defRPr>
-            </a:pPr>
-            <a:r>
-              <a:t>Alloy: proportions of different metals</a:t>
-            </a:r>
-          </a:p>
-          <a:p>
-            <a:pPr lvl="1">
-              <a:spcAft>
-                <a:spcPts val="800"/>
-              </a:spcAft>
-              <a:defRPr sz="1900">
-                <a:solidFill>
-                  <a:srgbClr val="222222"/>
-                </a:solidFill>
-                <a:latin typeface="Calibri"/>
-              </a:defRPr>
-            </a:pPr>
-            <a:r>
-              <a:t>Formulation: ingredients in a product</a:t>
-            </a:r>
-          </a:p>
-          <a:p>
-            <a:pPr>
-              <a:spcAft>
-                <a:spcPts val="800"/>
-              </a:spcAft>
-              <a:defRPr sz="2200" b="0">
-                <a:solidFill>
-                  <a:srgbClr val="222222"/>
-                </a:solidFill>
-                <a:latin typeface="Calibri"/>
-              </a:defRPr>
-            </a:pPr>
-            <a:r>
-              <a:t>Standard designs don't work (can't vary independently)</a:t>
-            </a:r>
-          </a:p>
-          <a:p>
-            <a:pPr>
-              <a:spcAft>
-                <a:spcPts val="800"/>
-              </a:spcAft>
-              <a:defRPr sz="2200" b="0">
-                <a:solidFill>
-                  <a:srgbClr val="222222"/>
-                </a:solidFill>
-                <a:latin typeface="Calibri"/>
-              </a:defRPr>
-            </a:pPr>
-            <a:r>
-              <a:t>doe-helper supports:</a:t>
-            </a:r>
-          </a:p>
-          <a:p>
-            <a:pPr lvl="1">
-              <a:spcAft>
-                <a:spcPts val="800"/>
-              </a:spcAft>
-              <a:defRPr sz="1900">
-                <a:solidFill>
-                  <a:srgbClr val="222222"/>
-                </a:solidFill>
-                <a:latin typeface="Calibri"/>
-              </a:defRPr>
-            </a:pPr>
-            <a:r>
-              <a:t>Simplex-Lattice: evenly-spaced mixture points</a:t>
-            </a:r>
-          </a:p>
-          <a:p>
-            <a:pPr lvl="1">
-              <a:spcAft>
-                <a:spcPts val="800"/>
-              </a:spcAft>
-              <a:defRPr sz="1900">
-                <a:solidFill>
-                  <a:srgbClr val="222222"/>
-                </a:solidFill>
-                <a:latin typeface="Calibri"/>
-              </a:defRPr>
-            </a:pPr>
-            <a:r>
-              <a:t>Simplex-Centroid: vertices, edge midpoints, center</a:t>
+            <a:pPr algn="l">
+              <a:defRPr sz="1400" b="0">
+                <a:solidFill>
+                  <a:srgbClr val="666666"/>
+                </a:solidFill>
+                <a:latin typeface="Inter"/>
+              </a:defRPr>
+            </a:pPr>
+            <a:r>
+              <a:t>Power analysis ensures your design can detect meaningful effects</a:t>
+            </a:r>
+          </a:p>
+        </p:txBody>
+      </p:sp>
+      <p:sp>
+        <p:nvSpPr>
+          <p:cNvPr id="8" name="TextBox 7"/>
+          <p:cNvSpPr txBox="1"/>
+          <p:nvPr/>
+        </p:nvSpPr>
+        <p:spPr>
+          <a:xfrm>
+            <a:off x="731520" y="6400800"/>
+            <a:ext cx="10058400" cy="365760"/>
+          </a:xfrm>
+          <a:prstGeom prst="rect">
+            <a:avLst/>
+          </a:prstGeom>
+          <a:noFill/>
+        </p:spPr>
+        <p:txBody>
+          <a:bodyPr wrap="square">
+            <a:spAutoFit/>
+          </a:bodyPr>
+          <a:lstStyle/>
+          <a:p>
+            <a:pPr algn="l">
+              <a:defRPr sz="1000" b="0">
+                <a:solidFill>
+                  <a:srgbClr val="999999"/>
+                </a:solidFill>
+                <a:latin typeface="Consolas"/>
+              </a:defRPr>
+            </a:pPr>
+            <a:r>
+              <a:t>© 2026 Martin J. Gallagher  |  GPL-3.0-or-later  |  doehelper.com</a:t>
             </a:r>
           </a:p>
         </p:txBody>
@@ -6346,7 +7007,7 @@
     <p:bg>
       <p:bgPr>
         <a:solidFill>
-          <a:srgbClr val="FFFFFF"/>
+          <a:srgbClr val="1E1B4B"/>
         </a:solidFill>
         <a:effectLst/>
       </p:bgPr>
@@ -6366,14 +7027,14 @@
         </p:nvSpPr>
         <p:spPr>
           <a:xfrm>
-            <a:off x="0" y="0"/>
-            <a:ext cx="12191695" cy="54864"/>
+            <a:off x="3657600" y="0"/>
+            <a:ext cx="4572000" cy="6858000"/>
           </a:xfrm>
           <a:prstGeom prst="rect">
             <a:avLst/>
           </a:prstGeom>
           <a:solidFill>
-            <a:srgbClr val="007BFF"/>
+            <a:srgbClr val="312E81"/>
           </a:solidFill>
           <a:ln>
             <a:noFill/>
@@ -6403,14 +7064,57 @@
       </p:sp>
       <p:sp>
         <p:nvSpPr>
-          <p:cNvPr id="3" name="TextBox 2"/>
+          <p:cNvPr id="3" name="Rectangle 2"/>
+          <p:cNvSpPr/>
+          <p:nvPr/>
+        </p:nvSpPr>
+        <p:spPr>
+          <a:xfrm>
+            <a:off x="8229600" y="0"/>
+            <a:ext cx="3962095" cy="6858000"/>
+          </a:xfrm>
+          <a:prstGeom prst="rect">
+            <a:avLst/>
+          </a:prstGeom>
+          <a:solidFill>
+            <a:srgbClr val="4338CA"/>
+          </a:solidFill>
+          <a:ln>
+            <a:noFill/>
+          </a:ln>
+        </p:spPr>
+        <p:style>
+          <a:lnRef idx="1">
+            <a:schemeClr val="accent1"/>
+          </a:lnRef>
+          <a:fillRef idx="3">
+            <a:schemeClr val="accent1"/>
+          </a:fillRef>
+          <a:effectRef idx="2">
+            <a:schemeClr val="accent1"/>
+          </a:effectRef>
+          <a:fontRef idx="minor">
+            <a:schemeClr val="lt1"/>
+          </a:fontRef>
+        </p:style>
+        <p:txBody>
+          <a:bodyPr rtlCol="0" anchor="ctr"/>
+          <a:lstStyle/>
+          <a:p>
+            <a:pPr algn="ctr"/>
+          </a:p>
+        </p:txBody>
+      </p:sp>
+      <p:sp>
+        <p:nvSpPr>
+          <p:cNvPr id="4" name="TextBox 3"/>
           <p:cNvSpPr txBox="1"/>
           <p:nvPr/>
         </p:nvSpPr>
         <p:spPr>
           <a:xfrm>
             <a:off x="731520" y="365760"/>
-            <a:ext cx="10515600" cy="822960"/>
+            <a:ext cx="10058400" cy="640080"/>
           </a:xfrm>
           <a:prstGeom prst="rect">
             <a:avLst/>
@@ -6423,30 +7127,640 @@
           </a:bodyPr>
           <a:lstStyle/>
           <a:p>
-            <a:pPr>
-              <a:defRPr sz="3200" b="1">
-                <a:solidFill>
-                  <a:srgbClr val="222222"/>
-                </a:solidFill>
-                <a:latin typeface="Calibri"/>
-              </a:defRPr>
-            </a:pPr>
-            <a:r>
-              <a:t>D-Optimal Designs</a:t>
-            </a:r>
-          </a:p>
-        </p:txBody>
-      </p:sp>
-      <p:sp>
-        <p:nvSpPr>
-          <p:cNvPr id="4" name="TextBox 3"/>
+            <a:pPr algn="l">
+              <a:defRPr sz="3000" b="1">
+                <a:solidFill>
+                  <a:srgbClr val="FFFFFF"/>
+                </a:solidFill>
+                <a:latin typeface="Inter"/>
+              </a:defRPr>
+            </a:pPr>
+            <a:r>
+              <a:t>Key Takeaways</a:t>
+            </a:r>
+          </a:p>
+        </p:txBody>
+      </p:sp>
+      <p:sp>
+        <p:nvSpPr>
+          <p:cNvPr id="5" name="Rounded Rectangle 4"/>
+          <p:cNvSpPr/>
+          <p:nvPr/>
+        </p:nvSpPr>
+        <p:spPr>
+          <a:xfrm>
+            <a:off x="731520" y="1280160"/>
+            <a:ext cx="10515600" cy="777240"/>
+          </a:xfrm>
+          <a:prstGeom prst="roundRect">
+            <a:avLst/>
+          </a:prstGeom>
+          <a:solidFill>
+            <a:srgbClr val="312E81"/>
+          </a:solidFill>
+          <a:ln>
+            <a:noFill/>
+          </a:ln>
+        </p:spPr>
+        <p:style>
+          <a:lnRef idx="1">
+            <a:schemeClr val="accent1"/>
+          </a:lnRef>
+          <a:fillRef idx="3">
+            <a:schemeClr val="accent1"/>
+          </a:fillRef>
+          <a:effectRef idx="2">
+            <a:schemeClr val="accent1"/>
+          </a:effectRef>
+          <a:fontRef idx="minor">
+            <a:schemeClr val="lt1"/>
+          </a:fontRef>
+        </p:style>
+        <p:txBody>
+          <a:bodyPr rtlCol="0" anchor="ctr"/>
+          <a:lstStyle/>
+          <a:p>
+            <a:pPr algn="ctr"/>
+          </a:p>
+        </p:txBody>
+      </p:sp>
+      <p:sp>
+        <p:nvSpPr>
+          <p:cNvPr id="6" name="Oval 5"/>
+          <p:cNvSpPr/>
+          <p:nvPr/>
+        </p:nvSpPr>
+        <p:spPr>
+          <a:xfrm>
+            <a:off x="1005840" y="1508760"/>
+            <a:ext cx="320040" cy="320040"/>
+          </a:xfrm>
+          <a:prstGeom prst="ellipse">
+            <a:avLst/>
+          </a:prstGeom>
+          <a:solidFill>
+            <a:srgbClr val="5046E5"/>
+          </a:solidFill>
+          <a:ln>
+            <a:noFill/>
+          </a:ln>
+        </p:spPr>
+        <p:style>
+          <a:lnRef idx="1">
+            <a:schemeClr val="accent1"/>
+          </a:lnRef>
+          <a:fillRef idx="3">
+            <a:schemeClr val="accent1"/>
+          </a:fillRef>
+          <a:effectRef idx="2">
+            <a:schemeClr val="accent1"/>
+          </a:effectRef>
+          <a:fontRef idx="minor">
+            <a:schemeClr val="lt1"/>
+          </a:fontRef>
+        </p:style>
+        <p:txBody>
+          <a:bodyPr rtlCol="0" anchor="ctr"/>
+          <a:lstStyle/>
+          <a:p>
+            <a:pPr algn="ctr"/>
+          </a:p>
+        </p:txBody>
+      </p:sp>
+      <p:sp>
+        <p:nvSpPr>
+          <p:cNvPr id="7" name="TextBox 6"/>
           <p:cNvSpPr txBox="1"/>
           <p:nvPr/>
         </p:nvSpPr>
         <p:spPr>
           <a:xfrm>
-            <a:off x="914400" y="1463040"/>
-            <a:ext cx="10058400" cy="4754880"/>
+            <a:off x="1554480" y="1325880"/>
+            <a:ext cx="9418320" cy="777240"/>
+          </a:xfrm>
+          <a:prstGeom prst="rect">
+            <a:avLst/>
+          </a:prstGeom>
+          <a:noFill/>
+        </p:spPr>
+        <p:txBody>
+          <a:bodyPr wrap="square" anchor="ctr">
+            <a:spAutoFit/>
+          </a:bodyPr>
+          <a:lstStyle/>
+          <a:p>
+            <a:pPr algn="l">
+              <a:defRPr sz="1800" b="0">
+                <a:solidFill>
+                  <a:srgbClr val="FFFFFF"/>
+                </a:solidFill>
+                <a:latin typeface="Inter"/>
+              </a:defRPr>
+            </a:pPr>
+            <a:r>
+              <a:t>Multi-response: desirability functions balance trade-offs</a:t>
+            </a:r>
+          </a:p>
+        </p:txBody>
+      </p:sp>
+      <p:sp>
+        <p:nvSpPr>
+          <p:cNvPr id="8" name="Rounded Rectangle 7"/>
+          <p:cNvSpPr/>
+          <p:nvPr/>
+        </p:nvSpPr>
+        <p:spPr>
+          <a:xfrm>
+            <a:off x="731520" y="2167128"/>
+            <a:ext cx="10515600" cy="777240"/>
+          </a:xfrm>
+          <a:prstGeom prst="roundRect">
+            <a:avLst/>
+          </a:prstGeom>
+          <a:solidFill>
+            <a:srgbClr val="312E81"/>
+          </a:solidFill>
+          <a:ln>
+            <a:noFill/>
+          </a:ln>
+        </p:spPr>
+        <p:style>
+          <a:lnRef idx="1">
+            <a:schemeClr val="accent1"/>
+          </a:lnRef>
+          <a:fillRef idx="3">
+            <a:schemeClr val="accent1"/>
+          </a:fillRef>
+          <a:effectRef idx="2">
+            <a:schemeClr val="accent1"/>
+          </a:effectRef>
+          <a:fontRef idx="minor">
+            <a:schemeClr val="lt1"/>
+          </a:fontRef>
+        </p:style>
+        <p:txBody>
+          <a:bodyPr rtlCol="0" anchor="ctr"/>
+          <a:lstStyle/>
+          <a:p>
+            <a:pPr algn="ctr"/>
+          </a:p>
+        </p:txBody>
+      </p:sp>
+      <p:sp>
+        <p:nvSpPr>
+          <p:cNvPr id="9" name="Oval 8"/>
+          <p:cNvSpPr/>
+          <p:nvPr/>
+        </p:nvSpPr>
+        <p:spPr>
+          <a:xfrm>
+            <a:off x="1005840" y="2395728"/>
+            <a:ext cx="320040" cy="320040"/>
+          </a:xfrm>
+          <a:prstGeom prst="ellipse">
+            <a:avLst/>
+          </a:prstGeom>
+          <a:solidFill>
+            <a:srgbClr val="5046E5"/>
+          </a:solidFill>
+          <a:ln>
+            <a:noFill/>
+          </a:ln>
+        </p:spPr>
+        <p:style>
+          <a:lnRef idx="1">
+            <a:schemeClr val="accent1"/>
+          </a:lnRef>
+          <a:fillRef idx="3">
+            <a:schemeClr val="accent1"/>
+          </a:fillRef>
+          <a:effectRef idx="2">
+            <a:schemeClr val="accent1"/>
+          </a:effectRef>
+          <a:fontRef idx="minor">
+            <a:schemeClr val="lt1"/>
+          </a:fontRef>
+        </p:style>
+        <p:txBody>
+          <a:bodyPr rtlCol="0" anchor="ctr"/>
+          <a:lstStyle/>
+          <a:p>
+            <a:pPr algn="ctr"/>
+          </a:p>
+        </p:txBody>
+      </p:sp>
+      <p:sp>
+        <p:nvSpPr>
+          <p:cNvPr id="10" name="TextBox 9"/>
+          <p:cNvSpPr txBox="1"/>
+          <p:nvPr/>
+        </p:nvSpPr>
+        <p:spPr>
+          <a:xfrm>
+            <a:off x="1554480" y="2212848"/>
+            <a:ext cx="9418320" cy="777240"/>
+          </a:xfrm>
+          <a:prstGeom prst="rect">
+            <a:avLst/>
+          </a:prstGeom>
+          <a:noFill/>
+        </p:spPr>
+        <p:txBody>
+          <a:bodyPr wrap="square" anchor="ctr">
+            <a:spAutoFit/>
+          </a:bodyPr>
+          <a:lstStyle/>
+          <a:p>
+            <a:pPr algn="l">
+              <a:defRPr sz="1800" b="0">
+                <a:solidFill>
+                  <a:srgbClr val="FFFFFF"/>
+                </a:solidFill>
+                <a:latin typeface="Inter"/>
+              </a:defRPr>
+            </a:pPr>
+            <a:r>
+              <a:t>doe augment extends designs without starting over</a:t>
+            </a:r>
+          </a:p>
+        </p:txBody>
+      </p:sp>
+      <p:sp>
+        <p:nvSpPr>
+          <p:cNvPr id="11" name="Rounded Rectangle 10"/>
+          <p:cNvSpPr/>
+          <p:nvPr/>
+        </p:nvSpPr>
+        <p:spPr>
+          <a:xfrm>
+            <a:off x="731520" y="3054096"/>
+            <a:ext cx="10515600" cy="777240"/>
+          </a:xfrm>
+          <a:prstGeom prst="roundRect">
+            <a:avLst/>
+          </a:prstGeom>
+          <a:solidFill>
+            <a:srgbClr val="312E81"/>
+          </a:solidFill>
+          <a:ln>
+            <a:noFill/>
+          </a:ln>
+        </p:spPr>
+        <p:style>
+          <a:lnRef idx="1">
+            <a:schemeClr val="accent1"/>
+          </a:lnRef>
+          <a:fillRef idx="3">
+            <a:schemeClr val="accent1"/>
+          </a:fillRef>
+          <a:effectRef idx="2">
+            <a:schemeClr val="accent1"/>
+          </a:effectRef>
+          <a:fontRef idx="minor">
+            <a:schemeClr val="lt1"/>
+          </a:fontRef>
+        </p:style>
+        <p:txBody>
+          <a:bodyPr rtlCol="0" anchor="ctr"/>
+          <a:lstStyle/>
+          <a:p>
+            <a:pPr algn="ctr"/>
+          </a:p>
+        </p:txBody>
+      </p:sp>
+      <p:sp>
+        <p:nvSpPr>
+          <p:cNvPr id="12" name="Oval 11"/>
+          <p:cNvSpPr/>
+          <p:nvPr/>
+        </p:nvSpPr>
+        <p:spPr>
+          <a:xfrm>
+            <a:off x="1005840" y="3282696"/>
+            <a:ext cx="320040" cy="320040"/>
+          </a:xfrm>
+          <a:prstGeom prst="ellipse">
+            <a:avLst/>
+          </a:prstGeom>
+          <a:solidFill>
+            <a:srgbClr val="5046E5"/>
+          </a:solidFill>
+          <a:ln>
+            <a:noFill/>
+          </a:ln>
+        </p:spPr>
+        <p:style>
+          <a:lnRef idx="1">
+            <a:schemeClr val="accent1"/>
+          </a:lnRef>
+          <a:fillRef idx="3">
+            <a:schemeClr val="accent1"/>
+          </a:fillRef>
+          <a:effectRef idx="2">
+            <a:schemeClr val="accent1"/>
+          </a:effectRef>
+          <a:fontRef idx="minor">
+            <a:schemeClr val="lt1"/>
+          </a:fontRef>
+        </p:style>
+        <p:txBody>
+          <a:bodyPr rtlCol="0" anchor="ctr"/>
+          <a:lstStyle/>
+          <a:p>
+            <a:pPr algn="ctr"/>
+          </a:p>
+        </p:txBody>
+      </p:sp>
+      <p:sp>
+        <p:nvSpPr>
+          <p:cNvPr id="13" name="TextBox 12"/>
+          <p:cNvSpPr txBox="1"/>
+          <p:nvPr/>
+        </p:nvSpPr>
+        <p:spPr>
+          <a:xfrm>
+            <a:off x="1554480" y="3099816"/>
+            <a:ext cx="9418320" cy="777240"/>
+          </a:xfrm>
+          <a:prstGeom prst="rect">
+            <a:avLst/>
+          </a:prstGeom>
+          <a:noFill/>
+        </p:spPr>
+        <p:txBody>
+          <a:bodyPr wrap="square" anchor="ctr">
+            <a:spAutoFit/>
+          </a:bodyPr>
+          <a:lstStyle/>
+          <a:p>
+            <a:pPr algn="l">
+              <a:defRPr sz="1800" b="0">
+                <a:solidFill>
+                  <a:srgbClr val="FFFFFF"/>
+                </a:solidFill>
+                <a:latin typeface="Inter"/>
+              </a:defRPr>
+            </a:pPr>
+            <a:r>
+              <a:t>Blocking removes nuisance variation systematically</a:t>
+            </a:r>
+          </a:p>
+        </p:txBody>
+      </p:sp>
+      <p:sp>
+        <p:nvSpPr>
+          <p:cNvPr id="14" name="Rounded Rectangle 13"/>
+          <p:cNvSpPr/>
+          <p:nvPr/>
+        </p:nvSpPr>
+        <p:spPr>
+          <a:xfrm>
+            <a:off x="731520" y="3941064"/>
+            <a:ext cx="10515600" cy="777240"/>
+          </a:xfrm>
+          <a:prstGeom prst="roundRect">
+            <a:avLst/>
+          </a:prstGeom>
+          <a:solidFill>
+            <a:srgbClr val="312E81"/>
+          </a:solidFill>
+          <a:ln>
+            <a:noFill/>
+          </a:ln>
+        </p:spPr>
+        <p:style>
+          <a:lnRef idx="1">
+            <a:schemeClr val="accent1"/>
+          </a:lnRef>
+          <a:fillRef idx="3">
+            <a:schemeClr val="accent1"/>
+          </a:fillRef>
+          <a:effectRef idx="2">
+            <a:schemeClr val="accent1"/>
+          </a:effectRef>
+          <a:fontRef idx="minor">
+            <a:schemeClr val="lt1"/>
+          </a:fontRef>
+        </p:style>
+        <p:txBody>
+          <a:bodyPr rtlCol="0" anchor="ctr"/>
+          <a:lstStyle/>
+          <a:p>
+            <a:pPr algn="ctr"/>
+          </a:p>
+        </p:txBody>
+      </p:sp>
+      <p:sp>
+        <p:nvSpPr>
+          <p:cNvPr id="15" name="Oval 14"/>
+          <p:cNvSpPr/>
+          <p:nvPr/>
+        </p:nvSpPr>
+        <p:spPr>
+          <a:xfrm>
+            <a:off x="1005840" y="4169664"/>
+            <a:ext cx="320040" cy="320040"/>
+          </a:xfrm>
+          <a:prstGeom prst="ellipse">
+            <a:avLst/>
+          </a:prstGeom>
+          <a:solidFill>
+            <a:srgbClr val="5046E5"/>
+          </a:solidFill>
+          <a:ln>
+            <a:noFill/>
+          </a:ln>
+        </p:spPr>
+        <p:style>
+          <a:lnRef idx="1">
+            <a:schemeClr val="accent1"/>
+          </a:lnRef>
+          <a:fillRef idx="3">
+            <a:schemeClr val="accent1"/>
+          </a:fillRef>
+          <a:effectRef idx="2">
+            <a:schemeClr val="accent1"/>
+          </a:effectRef>
+          <a:fontRef idx="minor">
+            <a:schemeClr val="lt1"/>
+          </a:fontRef>
+        </p:style>
+        <p:txBody>
+          <a:bodyPr rtlCol="0" anchor="ctr"/>
+          <a:lstStyle/>
+          <a:p>
+            <a:pPr algn="ctr"/>
+          </a:p>
+        </p:txBody>
+      </p:sp>
+      <p:sp>
+        <p:nvSpPr>
+          <p:cNvPr id="16" name="TextBox 15"/>
+          <p:cNvSpPr txBox="1"/>
+          <p:nvPr/>
+        </p:nvSpPr>
+        <p:spPr>
+          <a:xfrm>
+            <a:off x="1554480" y="3986784"/>
+            <a:ext cx="9418320" cy="777240"/>
+          </a:xfrm>
+          <a:prstGeom prst="rect">
+            <a:avLst/>
+          </a:prstGeom>
+          <a:noFill/>
+        </p:spPr>
+        <p:txBody>
+          <a:bodyPr wrap="square" anchor="ctr">
+            <a:spAutoFit/>
+          </a:bodyPr>
+          <a:lstStyle/>
+          <a:p>
+            <a:pPr algn="l">
+              <a:defRPr sz="1800" b="0">
+                <a:solidFill>
+                  <a:srgbClr val="FFFFFF"/>
+                </a:solidFill>
+                <a:latin typeface="Inter"/>
+              </a:defRPr>
+            </a:pPr>
+            <a:r>
+              <a:t>Taguchi designs optimise for robustness to noise</a:t>
+            </a:r>
+          </a:p>
+        </p:txBody>
+      </p:sp>
+      <p:sp>
+        <p:nvSpPr>
+          <p:cNvPr id="17" name="Rounded Rectangle 16"/>
+          <p:cNvSpPr/>
+          <p:nvPr/>
+        </p:nvSpPr>
+        <p:spPr>
+          <a:xfrm>
+            <a:off x="731520" y="4828032"/>
+            <a:ext cx="10515600" cy="777240"/>
+          </a:xfrm>
+          <a:prstGeom prst="roundRect">
+            <a:avLst/>
+          </a:prstGeom>
+          <a:solidFill>
+            <a:srgbClr val="312E81"/>
+          </a:solidFill>
+          <a:ln>
+            <a:noFill/>
+          </a:ln>
+        </p:spPr>
+        <p:style>
+          <a:lnRef idx="1">
+            <a:schemeClr val="accent1"/>
+          </a:lnRef>
+          <a:fillRef idx="3">
+            <a:schemeClr val="accent1"/>
+          </a:fillRef>
+          <a:effectRef idx="2">
+            <a:schemeClr val="accent1"/>
+          </a:effectRef>
+          <a:fontRef idx="minor">
+            <a:schemeClr val="lt1"/>
+          </a:fontRef>
+        </p:style>
+        <p:txBody>
+          <a:bodyPr rtlCol="0" anchor="ctr"/>
+          <a:lstStyle/>
+          <a:p>
+            <a:pPr algn="ctr"/>
+          </a:p>
+        </p:txBody>
+      </p:sp>
+      <p:sp>
+        <p:nvSpPr>
+          <p:cNvPr id="18" name="Oval 17"/>
+          <p:cNvSpPr/>
+          <p:nvPr/>
+        </p:nvSpPr>
+        <p:spPr>
+          <a:xfrm>
+            <a:off x="1005840" y="5056632"/>
+            <a:ext cx="320040" cy="320040"/>
+          </a:xfrm>
+          <a:prstGeom prst="ellipse">
+            <a:avLst/>
+          </a:prstGeom>
+          <a:solidFill>
+            <a:srgbClr val="5046E5"/>
+          </a:solidFill>
+          <a:ln>
+            <a:noFill/>
+          </a:ln>
+        </p:spPr>
+        <p:style>
+          <a:lnRef idx="1">
+            <a:schemeClr val="accent1"/>
+          </a:lnRef>
+          <a:fillRef idx="3">
+            <a:schemeClr val="accent1"/>
+          </a:fillRef>
+          <a:effectRef idx="2">
+            <a:schemeClr val="accent1"/>
+          </a:effectRef>
+          <a:fontRef idx="minor">
+            <a:schemeClr val="lt1"/>
+          </a:fontRef>
+        </p:style>
+        <p:txBody>
+          <a:bodyPr rtlCol="0" anchor="ctr"/>
+          <a:lstStyle/>
+          <a:p>
+            <a:pPr algn="ctr"/>
+          </a:p>
+        </p:txBody>
+      </p:sp>
+      <p:sp>
+        <p:nvSpPr>
+          <p:cNvPr id="19" name="TextBox 18"/>
+          <p:cNvSpPr txBox="1"/>
+          <p:nvPr/>
+        </p:nvSpPr>
+        <p:spPr>
+          <a:xfrm>
+            <a:off x="1554480" y="4873752"/>
+            <a:ext cx="9418320" cy="777240"/>
+          </a:xfrm>
+          <a:prstGeom prst="rect">
+            <a:avLst/>
+          </a:prstGeom>
+          <a:noFill/>
+        </p:spPr>
+        <p:txBody>
+          <a:bodyPr wrap="square" anchor="ctr">
+            <a:spAutoFit/>
+          </a:bodyPr>
+          <a:lstStyle/>
+          <a:p>
+            <a:pPr algn="l">
+              <a:defRPr sz="1800" b="0">
+                <a:solidFill>
+                  <a:srgbClr val="FFFFFF"/>
+                </a:solidFill>
+                <a:latin typeface="Inter"/>
+              </a:defRPr>
+            </a:pPr>
+            <a:r>
+              <a:t>D-Optimal handles constraints and irregular spaces</a:t>
+            </a:r>
+          </a:p>
+        </p:txBody>
+      </p:sp>
+      <p:sp>
+        <p:nvSpPr>
+          <p:cNvPr id="20" name="TextBox 19"/>
+          <p:cNvSpPr txBox="1"/>
+          <p:nvPr/>
+        </p:nvSpPr>
+        <p:spPr>
+          <a:xfrm>
+            <a:off x="731520" y="6400800"/>
+            <a:ext cx="10058400" cy="365760"/>
           </a:xfrm>
           <a:prstGeom prst="rect">
             <a:avLst/>
@@ -6459,131 +7773,16 @@
           </a:bodyPr>
           <a:lstStyle/>
           <a:p>
-            <a:pPr>
-              <a:spcAft>
-                <a:spcPts val="800"/>
-              </a:spcAft>
-              <a:defRPr sz="2200" b="0">
-                <a:solidFill>
-                  <a:srgbClr val="222222"/>
-                </a:solidFill>
-                <a:latin typeface="Calibri"/>
-              </a:defRPr>
-            </a:pPr>
-            <a:r>
-              <a:t>Computer-generated designs for non-standard situations:</a:t>
-            </a:r>
-          </a:p>
-          <a:p>
-            <a:pPr lvl="1">
-              <a:spcAft>
-                <a:spcPts val="800"/>
-              </a:spcAft>
-              <a:defRPr sz="1900">
-                <a:solidFill>
-                  <a:srgbClr val="222222"/>
-                </a:solidFill>
-                <a:latin typeface="Calibri"/>
-              </a:defRPr>
-            </a:pPr>
-            <a:r>
-              <a:t>Irregular factor space (constraints)</a:t>
-            </a:r>
-          </a:p>
-          <a:p>
-            <a:pPr lvl="1">
-              <a:spcAft>
-                <a:spcPts val="800"/>
-              </a:spcAft>
-              <a:defRPr sz="1900">
-                <a:solidFill>
-                  <a:srgbClr val="222222"/>
-                </a:solidFill>
-                <a:latin typeface="Calibri"/>
-              </a:defRPr>
-            </a:pPr>
-            <a:r>
-              <a:t>Mix of continuous and categorical factors</a:t>
-            </a:r>
-          </a:p>
-          <a:p>
-            <a:pPr lvl="1">
-              <a:spcAft>
-                <a:spcPts val="800"/>
-              </a:spcAft>
-              <a:defRPr sz="1900">
-                <a:solidFill>
-                  <a:srgbClr val="222222"/>
-                </a:solidFill>
-                <a:latin typeface="Calibri"/>
-              </a:defRPr>
-            </a:pPr>
-            <a:r>
-              <a:t>Limited run budget</a:t>
-            </a:r>
-          </a:p>
-          <a:p>
-            <a:pPr>
-              <a:spcAft>
-                <a:spcPts val="800"/>
-              </a:spcAft>
-              <a:defRPr sz="2200" b="0">
-                <a:solidFill>
-                  <a:srgbClr val="222222"/>
-                </a:solidFill>
-                <a:latin typeface="Calibri"/>
-              </a:defRPr>
-            </a:pPr>
-            <a:r>
-              <a:t>Maximises the determinant of X'X (D-optimality)</a:t>
-            </a:r>
-          </a:p>
-          <a:p>
-            <a:pPr>
-              <a:spcAft>
-                <a:spcPts val="800"/>
-              </a:spcAft>
-              <a:defRPr sz="2200" b="0">
-                <a:solidFill>
-                  <a:srgbClr val="222222"/>
-                </a:solidFill>
-                <a:latin typeface="Calibri"/>
-              </a:defRPr>
-            </a:pPr>
-            <a:r>
-              <a:t>Uses the Fedorov exchange algorithm</a:t>
-            </a:r>
-          </a:p>
-          <a:p>
-            <a:pPr>
-              <a:spcAft>
-                <a:spcPts val="800"/>
-              </a:spcAft>
-              <a:defRPr sz="2200" b="0">
-                <a:solidFill>
-                  <a:srgbClr val="222222"/>
-                </a:solidFill>
-                <a:latin typeface="Calibri"/>
-              </a:defRPr>
-            </a:pPr>
-            <a:r>
-              <a:t>doe-helper: set "type": "d_optimal", "runs": N</a:t>
-            </a:r>
-          </a:p>
-          <a:p>
-            <a:pPr>
-              <a:spcAft>
-                <a:spcPts val="800"/>
-              </a:spcAft>
-              <a:defRPr sz="2200" b="0">
-                <a:solidFill>
-                  <a:srgbClr val="222222"/>
-                </a:solidFill>
-                <a:latin typeface="Calibri"/>
-              </a:defRPr>
-            </a:pPr>
-            <a:r>
-              <a:t>Flexible but requires specifying the number of runs</a:t>
+            <a:pPr algn="l">
+              <a:defRPr sz="1000" b="0">
+                <a:solidFill>
+                  <a:srgbClr val="6366F1"/>
+                </a:solidFill>
+                <a:latin typeface="Consolas"/>
+              </a:defRPr>
+            </a:pPr>
+            <a:r>
+              <a:t>© 2026 Martin J. Gallagher  |  GPL-3.0-or-later</a:t>
             </a:r>
           </a:p>
         </p:txBody>
